--- a/PPTX/Parts/Part-CurvedBregmanDivergence.pptx
+++ b/PPTX/Parts/Part-CurvedBregmanDivergence.pptx
@@ -5,7 +5,7 @@
     <p:sldMasterId id="2147483648" r:id="rId1"/>
   </p:sldMasterIdLst>
   <p:notesMasterIdLst>
-    <p:notesMasterId r:id="rId26"/>
+    <p:notesMasterId r:id="rId27"/>
   </p:notesMasterIdLst>
   <p:sldIdLst>
     <p:sldId id="256" r:id="rId2"/>
@@ -16,22 +16,23 @@
     <p:sldId id="511" r:id="rId7"/>
     <p:sldId id="509" r:id="rId8"/>
     <p:sldId id="510" r:id="rId9"/>
-    <p:sldId id="416" r:id="rId10"/>
-    <p:sldId id="502" r:id="rId11"/>
-    <p:sldId id="495" r:id="rId12"/>
-    <p:sldId id="504" r:id="rId13"/>
-    <p:sldId id="433" r:id="rId14"/>
-    <p:sldId id="417" r:id="rId15"/>
-    <p:sldId id="501" r:id="rId16"/>
-    <p:sldId id="507" r:id="rId17"/>
-    <p:sldId id="503" r:id="rId18"/>
-    <p:sldId id="506" r:id="rId19"/>
-    <p:sldId id="508" r:id="rId20"/>
-    <p:sldId id="451" r:id="rId21"/>
-    <p:sldId id="428" r:id="rId22"/>
-    <p:sldId id="493" r:id="rId23"/>
-    <p:sldId id="453" r:id="rId24"/>
-    <p:sldId id="499" r:id="rId25"/>
+    <p:sldId id="512" r:id="rId10"/>
+    <p:sldId id="416" r:id="rId11"/>
+    <p:sldId id="502" r:id="rId12"/>
+    <p:sldId id="495" r:id="rId13"/>
+    <p:sldId id="504" r:id="rId14"/>
+    <p:sldId id="433" r:id="rId15"/>
+    <p:sldId id="417" r:id="rId16"/>
+    <p:sldId id="501" r:id="rId17"/>
+    <p:sldId id="507" r:id="rId18"/>
+    <p:sldId id="503" r:id="rId19"/>
+    <p:sldId id="506" r:id="rId20"/>
+    <p:sldId id="508" r:id="rId21"/>
+    <p:sldId id="451" r:id="rId22"/>
+    <p:sldId id="428" r:id="rId23"/>
+    <p:sldId id="493" r:id="rId24"/>
+    <p:sldId id="453" r:id="rId25"/>
+    <p:sldId id="499" r:id="rId26"/>
   </p:sldIdLst>
   <p:sldSz cx="12192000" cy="6858000"/>
   <p:notesSz cx="6858000" cy="9144000"/>
@@ -220,7 +221,7 @@
           <a:p>
             <a:fld id="{3008671C-23ED-4EC6-941E-40C0CFE3F600}" type="datetimeFigureOut">
               <a:rPr kumimoji="1" lang="ja-JP" altLang="en-US" smtClean="0"/>
-              <a:t>2026/4/7</a:t>
+              <a:t>2026/7/7</a:t>
             </a:fld>
             <a:endParaRPr kumimoji="1" lang="ja-JP" altLang="en-US"/>
           </a:p>
@@ -1298,7 +1299,13 @@
   <p:cSld>
     <p:spTree>
       <p:nvGrpSpPr>
-        <p:cNvPr id="1" name=""/>
+        <p:cNvPr id="1" name="">
+          <a:extLst>
+            <a:ext uri="{FF2B5EF4-FFF2-40B4-BE49-F238E27FC236}">
+              <a16:creationId xmlns:a16="http://schemas.microsoft.com/office/drawing/2014/main" id="{373CAF4B-E991-1A7E-212A-918A8DE7652A}"/>
+            </a:ext>
+          </a:extLst>
+        </p:cNvPr>
         <p:cNvGrpSpPr/>
         <p:nvPr/>
       </p:nvGrpSpPr>
@@ -1312,7 +1319,13 @@
       </p:grpSpPr>
       <p:sp>
         <p:nvSpPr>
-          <p:cNvPr id="2" name="Slide Image Placeholder 1"/>
+          <p:cNvPr id="2" name="Slide Image Placeholder 1">
+            <a:extLst>
+              <a:ext uri="{FF2B5EF4-FFF2-40B4-BE49-F238E27FC236}">
+                <a16:creationId xmlns:a16="http://schemas.microsoft.com/office/drawing/2014/main" id="{3EE185C7-408A-F36A-C4F8-2E0A954C0888}"/>
+              </a:ext>
+            </a:extLst>
+          </p:cNvPr>
           <p:cNvSpPr>
             <a:spLocks noGrp="1" noRot="1" noChangeAspect="1"/>
           </p:cNvSpPr>
@@ -1324,7 +1337,13 @@
       </p:sp>
       <p:sp>
         <p:nvSpPr>
-          <p:cNvPr id="3" name="Notes Placeholder 2"/>
+          <p:cNvPr id="3" name="Notes Placeholder 2">
+            <a:extLst>
+              <a:ext uri="{FF2B5EF4-FFF2-40B4-BE49-F238E27FC236}">
+                <a16:creationId xmlns:a16="http://schemas.microsoft.com/office/drawing/2014/main" id="{86B54634-7E8B-5309-C964-89A5E0FD93A3}"/>
+              </a:ext>
+            </a:extLst>
+          </p:cNvPr>
           <p:cNvSpPr>
             <a:spLocks noGrp="1"/>
           </p:cNvSpPr>
@@ -1338,49 +1357,22 @@
           <a:lstStyle/>
           <a:p>
             <a:r>
-              <a:rPr kumimoji="1" lang="en-US" altLang="ja-JP" sz="1200" dirty="0"/>
-              <a:t>Example: </a:t>
-            </a:r>
-          </a:p>
-          <a:p>
-            <a:r>
-              <a:rPr kumimoji="1" lang="en-US" altLang="ja-JP" sz="1200" dirty="0"/>
-              <a:t>KLD between 0-centered normal distributions with covariance matrices  c(</a:t>
-            </a:r>
-            <a:r>
-              <a:rPr lang="el-GR" altLang="ja-JP" sz="1200" dirty="0">
-                <a:latin typeface="Google Sans"/>
-              </a:rPr>
-              <a:t>λ</a:t>
-            </a:r>
-            <a:r>
-              <a:rPr kumimoji="1" lang="en-US" altLang="ja-JP" sz="1200" dirty="0"/>
-              <a:t>)=</a:t>
-            </a:r>
-            <a:r>
-              <a:rPr lang="el-GR" altLang="ja-JP" sz="1200" dirty="0">
-                <a:latin typeface="Google Sans"/>
-              </a:rPr>
-              <a:t>λ</a:t>
-            </a:r>
-            <a:r>
-              <a:rPr lang="el-GR" altLang="ja-JP" sz="1200" dirty="0"/>
-              <a:t>Σ</a:t>
-            </a:r>
-            <a:r>
-              <a:rPr kumimoji="1" lang="en-US" altLang="ja-JP" sz="1200" dirty="0"/>
-              <a:t> </a:t>
-            </a:r>
-            <a:endParaRPr kumimoji="1" lang="ja-JP" altLang="en-US" sz="1200" dirty="0"/>
-          </a:p>
-          <a:p>
+              <a:rPr kumimoji="1" lang="en-US" altLang="ja-JP" dirty="0"/>
+              <a:t>https://www2.sonycsl.co.jp/person/nielsen/infogeo/pdf/Slide-ISVD2009.pdf</a:t>
+            </a:r>
             <a:endParaRPr kumimoji="1" lang="ja-JP" altLang="en-US" dirty="0"/>
           </a:p>
         </p:txBody>
       </p:sp>
       <p:sp>
         <p:nvSpPr>
-          <p:cNvPr id="4" name="Slide Number Placeholder 3"/>
+          <p:cNvPr id="4" name="Slide Number Placeholder 3">
+            <a:extLst>
+              <a:ext uri="{FF2B5EF4-FFF2-40B4-BE49-F238E27FC236}">
+                <a16:creationId xmlns:a16="http://schemas.microsoft.com/office/drawing/2014/main" id="{C7996B38-4E50-C26E-3545-891EBA4C23A4}"/>
+              </a:ext>
+            </a:extLst>
+          </p:cNvPr>
           <p:cNvSpPr>
             <a:spLocks noGrp="1"/>
           </p:cNvSpPr>
@@ -1404,7 +1396,7 @@
     </p:spTree>
     <p:extLst>
       <p:ext uri="{BB962C8B-B14F-4D97-AF65-F5344CB8AC3E}">
-        <p14:creationId xmlns:p14="http://schemas.microsoft.com/office/powerpoint/2010/main" val="3831810033"/>
+        <p14:creationId xmlns:p14="http://schemas.microsoft.com/office/powerpoint/2010/main" val="1778277480"/>
       </p:ext>
     </p:extLst>
   </p:cSld>
@@ -1459,30 +1451,43 @@
           <a:lstStyle/>
           <a:p>
             <a:r>
-              <a:rPr kumimoji="1" lang="en-US" altLang="ja-JP" sz="1200" b="1" i="0" kern="1200" dirty="0" err="1">
-                <a:solidFill>
-                  <a:schemeClr val="tx1"/>
-                </a:solidFill>
-                <a:effectLst/>
-                <a:latin typeface="+mn-lt"/>
-                <a:ea typeface="+mn-ea"/>
-                <a:cs typeface="+mn-cs"/>
-              </a:rPr>
-              <a:t>Kullback-Leibler</a:t>
-            </a:r>
-            <a:r>
-              <a:rPr kumimoji="1" lang="en-US" altLang="ja-JP" sz="1200" b="1" i="0" kern="1200">
-                <a:solidFill>
-                  <a:schemeClr val="tx1"/>
-                </a:solidFill>
-                <a:effectLst/>
-                <a:latin typeface="+mn-lt"/>
-                <a:ea typeface="+mn-ea"/>
-                <a:cs typeface="+mn-cs"/>
-              </a:rPr>
-              <a:t> distance between complex generalized Gaussian distributions</a:t>
-            </a:r>
-            <a:endParaRPr kumimoji="1" lang="ja-JP" altLang="en-US"/>
+              <a:rPr kumimoji="1" lang="en-US" altLang="ja-JP" sz="1200" dirty="0"/>
+              <a:t>Example: </a:t>
+            </a:r>
+          </a:p>
+          <a:p>
+            <a:r>
+              <a:rPr kumimoji="1" lang="en-US" altLang="ja-JP" sz="1200" dirty="0"/>
+              <a:t>KLD between 0-centered normal distributions with covariance matrices  c(</a:t>
+            </a:r>
+            <a:r>
+              <a:rPr lang="el-GR" altLang="ja-JP" sz="1200" dirty="0">
+                <a:latin typeface="Google Sans"/>
+              </a:rPr>
+              <a:t>λ</a:t>
+            </a:r>
+            <a:r>
+              <a:rPr kumimoji="1" lang="en-US" altLang="ja-JP" sz="1200" dirty="0"/>
+              <a:t>)=</a:t>
+            </a:r>
+            <a:r>
+              <a:rPr lang="el-GR" altLang="ja-JP" sz="1200" dirty="0">
+                <a:latin typeface="Google Sans"/>
+              </a:rPr>
+              <a:t>λ</a:t>
+            </a:r>
+            <a:r>
+              <a:rPr lang="el-GR" altLang="ja-JP" sz="1200" dirty="0"/>
+              <a:t>Σ</a:t>
+            </a:r>
+            <a:r>
+              <a:rPr kumimoji="1" lang="en-US" altLang="ja-JP" sz="1200" dirty="0"/>
+              <a:t> </a:t>
+            </a:r>
+            <a:endParaRPr kumimoji="1" lang="ja-JP" altLang="en-US" sz="1200" dirty="0"/>
+          </a:p>
+          <a:p>
+            <a:endParaRPr kumimoji="1" lang="ja-JP" altLang="en-US" dirty="0"/>
           </a:p>
         </p:txBody>
       </p:sp>
@@ -1503,7 +1508,7 @@
           <a:p>
             <a:fld id="{62F41A8F-8FCA-4B74-8117-8AD58E73107D}" type="slidenum">
               <a:rPr kumimoji="1" lang="ja-JP" altLang="en-US" smtClean="0"/>
-              <a:t>13</a:t>
+              <a:t>10</a:t>
             </a:fld>
             <a:endParaRPr kumimoji="1" lang="ja-JP" altLang="en-US"/>
           </a:p>
@@ -1512,7 +1517,7 @@
     </p:spTree>
     <p:extLst>
       <p:ext uri="{BB962C8B-B14F-4D97-AF65-F5344CB8AC3E}">
-        <p14:creationId xmlns:p14="http://schemas.microsoft.com/office/powerpoint/2010/main" val="4034456188"/>
+        <p14:creationId xmlns:p14="http://schemas.microsoft.com/office/powerpoint/2010/main" val="3831810033"/>
       </p:ext>
     </p:extLst>
   </p:cSld>
@@ -1567,10 +1572,30 @@
           <a:lstStyle/>
           <a:p>
             <a:r>
-              <a:rPr lang="en-US" altLang="ja-JP" dirty="0"/>
-              <a:t>Q SPD, </a:t>
-            </a:r>
-            <a:endParaRPr kumimoji="1" lang="ja-JP" altLang="en-US" dirty="0"/>
+              <a:rPr kumimoji="1" lang="en-US" altLang="ja-JP" sz="1200" b="1" i="0" kern="1200" dirty="0" err="1">
+                <a:solidFill>
+                  <a:schemeClr val="tx1"/>
+                </a:solidFill>
+                <a:effectLst/>
+                <a:latin typeface="+mn-lt"/>
+                <a:ea typeface="+mn-ea"/>
+                <a:cs typeface="+mn-cs"/>
+              </a:rPr>
+              <a:t>Kullback-Leibler</a:t>
+            </a:r>
+            <a:r>
+              <a:rPr kumimoji="1" lang="en-US" altLang="ja-JP" sz="1200" b="1" i="0" kern="1200">
+                <a:solidFill>
+                  <a:schemeClr val="tx1"/>
+                </a:solidFill>
+                <a:effectLst/>
+                <a:latin typeface="+mn-lt"/>
+                <a:ea typeface="+mn-ea"/>
+                <a:cs typeface="+mn-cs"/>
+              </a:rPr>
+              <a:t> distance between complex generalized Gaussian distributions</a:t>
+            </a:r>
+            <a:endParaRPr kumimoji="1" lang="ja-JP" altLang="en-US"/>
           </a:p>
         </p:txBody>
       </p:sp>
@@ -1591,7 +1616,7 @@
           <a:p>
             <a:fld id="{62F41A8F-8FCA-4B74-8117-8AD58E73107D}" type="slidenum">
               <a:rPr kumimoji="1" lang="ja-JP" altLang="en-US" smtClean="0"/>
-              <a:t>20</a:t>
+              <a:t>14</a:t>
             </a:fld>
             <a:endParaRPr kumimoji="1" lang="ja-JP" altLang="en-US"/>
           </a:p>
@@ -1600,7 +1625,7 @@
     </p:spTree>
     <p:extLst>
       <p:ext uri="{BB962C8B-B14F-4D97-AF65-F5344CB8AC3E}">
-        <p14:creationId xmlns:p14="http://schemas.microsoft.com/office/powerpoint/2010/main" val="2179518522"/>
+        <p14:creationId xmlns:p14="http://schemas.microsoft.com/office/powerpoint/2010/main" val="4034456188"/>
       </p:ext>
     </p:extLst>
   </p:cSld>
@@ -1654,42 +1679,10 @@
           <a:bodyPr/>
           <a:lstStyle/>
           <a:p>
-            <a:pPr marL="0" marR="0" lvl="0" indent="0" algn="l" defTabSz="914400" rtl="0" eaLnBrk="1" fontAlgn="auto" latinLnBrk="0" hangingPunct="1">
-              <a:lnSpc>
-                <a:spcPct val="100000"/>
-              </a:lnSpc>
-              <a:spcBef>
-                <a:spcPts val="0"/>
-              </a:spcBef>
-              <a:spcAft>
-                <a:spcPts val="0"/>
-              </a:spcAft>
-              <a:buClrTx/>
-              <a:buSzTx/>
-              <a:buFontTx/>
-              <a:buNone/>
-              <a:tabLst/>
-              <a:defRPr/>
-            </a:pPr>
             <a:r>
               <a:rPr lang="en-US" altLang="ja-JP" dirty="0"/>
-              <a:t>a </a:t>
-            </a:r>
-            <a:r>
-              <a:rPr lang="en-US" altLang="ja-JP" b="1" dirty="0">
-                <a:solidFill>
-                  <a:srgbClr val="FF0000"/>
-                </a:solidFill>
-              </a:rPr>
-              <a:t>f-divergence</a:t>
-            </a:r>
-            <a:r>
-              <a:rPr lang="en-US" altLang="ja-JP" dirty="0"/>
-              <a:t> for f(u)=-log u</a:t>
-            </a:r>
-            <a:endParaRPr kumimoji="1" lang="en-US" altLang="ja-JP" dirty="0"/>
-          </a:p>
-          <a:p>
+              <a:t>Q SPD, </a:t>
+            </a:r>
             <a:endParaRPr kumimoji="1" lang="ja-JP" altLang="en-US" dirty="0"/>
           </a:p>
         </p:txBody>
@@ -1709,7 +1702,7 @@
           <a:bodyPr/>
           <a:lstStyle/>
           <a:p>
-            <a:fld id="{061BD5CE-3F97-4822-9013-BB9FF2912E0B}" type="slidenum">
+            <a:fld id="{62F41A8F-8FCA-4B74-8117-8AD58E73107D}" type="slidenum">
               <a:rPr kumimoji="1" lang="ja-JP" altLang="en-US" smtClean="0"/>
               <a:t>21</a:t>
             </a:fld>
@@ -1720,7 +1713,7 @@
     </p:spTree>
     <p:extLst>
       <p:ext uri="{BB962C8B-B14F-4D97-AF65-F5344CB8AC3E}">
-        <p14:creationId xmlns:p14="http://schemas.microsoft.com/office/powerpoint/2010/main" val="3107663179"/>
+        <p14:creationId xmlns:p14="http://schemas.microsoft.com/office/powerpoint/2010/main" val="2179518522"/>
       </p:ext>
     </p:extLst>
   </p:cSld>
@@ -1774,69 +1767,26 @@
           <a:bodyPr/>
           <a:lstStyle/>
           <a:p>
-            <a:r>
-              <a:rPr lang="ja-JP" altLang="en-US" b="0" i="0" dirty="0">
-                <a:solidFill>
-                  <a:srgbClr val="DF000F"/>
-                </a:solidFill>
-                <a:effectLst/>
-                <a:latin typeface="Source Sans Pro" panose="020B0503030403020204" pitchFamily="34" charset="0"/>
-              </a:rPr>
-              <a:t>∫</a:t>
-            </a:r>
-            <a:r>
-              <a:rPr lang="el-GR" altLang="ja-JP" b="0" i="0" dirty="0">
-                <a:solidFill>
-                  <a:srgbClr val="DF000F"/>
-                </a:solidFill>
-                <a:effectLst/>
-                <a:latin typeface="Source Sans Pro" panose="020B0503030403020204" pitchFamily="34" charset="0"/>
-              </a:rPr>
-              <a:t>μ</a:t>
-            </a:r>
-            <a:endParaRPr lang="en-US" altLang="ja-JP" b="0" i="0" dirty="0">
-              <a:solidFill>
-                <a:srgbClr val="DF000F"/>
-              </a:solidFill>
-              <a:effectLst/>
-              <a:latin typeface="Source Sans Pro" panose="020B0503030403020204" pitchFamily="34" charset="0"/>
-            </a:endParaRPr>
-          </a:p>
-          <a:p>
-            <a:r>
-              <a:rPr lang="ja-JP" altLang="en-US" b="0" i="0" dirty="0">
-                <a:solidFill>
-                  <a:srgbClr val="DF000F"/>
-                </a:solidFill>
-                <a:effectLst/>
-                <a:latin typeface="Source Sans Pro" panose="020B0503030403020204" pitchFamily="34" charset="0"/>
-              </a:rPr>
-              <a:t>∇</a:t>
-            </a:r>
-            <a:r>
-              <a:rPr lang="en-US" altLang="ja-JP" b="0" i="0" dirty="0">
-                <a:solidFill>
-                  <a:srgbClr val="DF000F"/>
-                </a:solidFill>
-                <a:effectLst/>
-                <a:latin typeface="Source Sans Pro" panose="020B0503030403020204" pitchFamily="34" charset="0"/>
-              </a:rPr>
-              <a:t>F easy!</a:t>
-            </a:r>
-          </a:p>
-          <a:p>
-            <a:endParaRPr kumimoji="1" lang="en-US" altLang="ja-JP" b="0" i="0" dirty="0">
-              <a:solidFill>
-                <a:srgbClr val="DF000F"/>
-              </a:solidFill>
-              <a:effectLst/>
-              <a:latin typeface="Source Sans Pro" panose="020B0503030403020204" pitchFamily="34" charset="0"/>
-            </a:endParaRPr>
-          </a:p>
-          <a:p>
+            <a:pPr marL="0" marR="0" lvl="0" indent="0" algn="l" defTabSz="914400" rtl="0" eaLnBrk="1" fontAlgn="auto" latinLnBrk="0" hangingPunct="1">
+              <a:lnSpc>
+                <a:spcPct val="100000"/>
+              </a:lnSpc>
+              <a:spcBef>
+                <a:spcPts val="0"/>
+              </a:spcBef>
+              <a:spcAft>
+                <a:spcPts val="0"/>
+              </a:spcAft>
+              <a:buClrTx/>
+              <a:buSzTx/>
+              <a:buFontTx/>
+              <a:buNone/>
+              <a:tabLst/>
+              <a:defRPr/>
+            </a:pPr>
             <a:r>
               <a:rPr lang="en-US" altLang="ja-JP" dirty="0"/>
-              <a:t>Information geometry proves that </a:t>
+              <a:t>a </a:t>
             </a:r>
             <a:r>
               <a:rPr lang="en-US" altLang="ja-JP" b="1" dirty="0">
@@ -1844,413 +1794,13 @@
                   <a:srgbClr val="FF0000"/>
                 </a:solidFill>
               </a:rPr>
-              <a:t>B</a:t>
-            </a:r>
-            <a:r>
-              <a:rPr lang="en-US" altLang="ja-JP" b="1" baseline="-25000" dirty="0">
-                <a:solidFill>
-                  <a:srgbClr val="FF0000"/>
-                </a:solidFill>
-              </a:rPr>
-              <a:t>F</a:t>
-            </a:r>
-            <a:r>
-              <a:rPr lang="en-US" altLang="ja-JP" b="1" dirty="0">
-                <a:solidFill>
-                  <a:srgbClr val="FF0000"/>
-                </a:solidFill>
-              </a:rPr>
-              <a:t>(</a:t>
-            </a:r>
-            <a:r>
-              <a:rPr lang="el-GR" altLang="ja-JP" b="1" i="0" dirty="0">
-                <a:solidFill>
-                  <a:srgbClr val="FF0000"/>
-                </a:solidFill>
-                <a:effectLst/>
-                <a:latin typeface="Source Sans Pro" panose="020B0503030403020204" pitchFamily="34" charset="0"/>
-              </a:rPr>
-              <a:t>θ</a:t>
-            </a:r>
-            <a:r>
-              <a:rPr lang="en-US" altLang="ja-JP" b="1" i="0" baseline="-25000" dirty="0">
-                <a:solidFill>
-                  <a:srgbClr val="FF0000"/>
-                </a:solidFill>
-                <a:effectLst/>
-                <a:latin typeface="Source Sans Pro" panose="020B0503030403020204" pitchFamily="34" charset="0"/>
-              </a:rPr>
-              <a:t>1</a:t>
-            </a:r>
-            <a:r>
-              <a:rPr lang="el-GR" altLang="ja-JP" b="1" i="0" dirty="0">
-                <a:solidFill>
-                  <a:srgbClr val="FF0000"/>
-                </a:solidFill>
-                <a:effectLst/>
-                <a:latin typeface="Source Sans Pro" panose="020B0503030403020204" pitchFamily="34" charset="0"/>
-              </a:rPr>
-              <a:t> </a:t>
-            </a:r>
-            <a:r>
-              <a:rPr lang="en-US" altLang="ja-JP" b="1" dirty="0">
-                <a:solidFill>
-                  <a:srgbClr val="FF0000"/>
-                </a:solidFill>
-              </a:rPr>
-              <a:t>:</a:t>
-            </a:r>
-            <a:r>
-              <a:rPr lang="el-GR" altLang="ja-JP" b="1" i="0" dirty="0">
-                <a:solidFill>
-                  <a:srgbClr val="FF0000"/>
-                </a:solidFill>
-                <a:effectLst/>
-                <a:latin typeface="Source Sans Pro" panose="020B0503030403020204" pitchFamily="34" charset="0"/>
-              </a:rPr>
-              <a:t> θ</a:t>
-            </a:r>
-            <a:r>
-              <a:rPr lang="en-US" altLang="ja-JP" b="1" i="0" baseline="-25000" dirty="0">
-                <a:solidFill>
-                  <a:srgbClr val="FF0000"/>
-                </a:solidFill>
-                <a:effectLst/>
-                <a:latin typeface="Source Sans Pro" panose="020B0503030403020204" pitchFamily="34" charset="0"/>
-              </a:rPr>
-              <a:t>2</a:t>
-            </a:r>
-            <a:r>
-              <a:rPr lang="en-US" altLang="ja-JP" b="1" dirty="0">
-                <a:solidFill>
-                  <a:srgbClr val="FF0000"/>
-                </a:solidFill>
-              </a:rPr>
-              <a:t>)= D</a:t>
-            </a:r>
-            <a:r>
-              <a:rPr lang="en-US" altLang="ja-JP" b="1" baseline="-25000" dirty="0">
-                <a:solidFill>
-                  <a:srgbClr val="FF0000"/>
-                </a:solidFill>
-              </a:rPr>
-              <a:t>KL</a:t>
-            </a:r>
-            <a:r>
-              <a:rPr lang="en-US" altLang="ja-JP" dirty="0">
-                <a:solidFill>
-                  <a:srgbClr val="FF0000"/>
-                </a:solidFill>
-              </a:rPr>
-              <a:t>*</a:t>
-            </a:r>
-            <a:r>
-              <a:rPr lang="en-US" altLang="ja-JP" b="1" dirty="0">
-                <a:solidFill>
-                  <a:srgbClr val="FF0000"/>
-                </a:solidFill>
-              </a:rPr>
-              <a:t>[p</a:t>
-            </a:r>
-            <a:r>
-              <a:rPr lang="en-US" altLang="ja-JP" b="1" dirty="0">
-                <a:solidFill>
-                  <a:srgbClr val="FF0000"/>
-                </a:solidFill>
-                <a:latin typeface="Source Sans Pro" panose="020B0503030403020204" pitchFamily="34" charset="0"/>
-              </a:rPr>
-              <a:t>(x|</a:t>
-            </a:r>
-            <a:r>
-              <a:rPr lang="el-GR" altLang="ja-JP" b="1" i="0" dirty="0">
-                <a:solidFill>
-                  <a:srgbClr val="FF0000"/>
-                </a:solidFill>
-                <a:effectLst/>
-                <a:latin typeface="Source Sans Pro" panose="020B0503030403020204" pitchFamily="34" charset="0"/>
-              </a:rPr>
-              <a:t>θ</a:t>
-            </a:r>
-            <a:r>
-              <a:rPr lang="en-US" altLang="ja-JP" b="1" i="0" baseline="-25000" dirty="0">
-                <a:solidFill>
-                  <a:srgbClr val="FF0000"/>
-                </a:solidFill>
-                <a:effectLst/>
-                <a:latin typeface="Source Sans Pro" panose="020B0503030403020204" pitchFamily="34" charset="0"/>
-              </a:rPr>
-              <a:t>1</a:t>
-            </a:r>
-            <a:r>
-              <a:rPr lang="en-US" altLang="ja-JP" dirty="0">
-                <a:solidFill>
-                  <a:srgbClr val="FF0000"/>
-                </a:solidFill>
-              </a:rPr>
-              <a:t>)</a:t>
-            </a:r>
-            <a:r>
-              <a:rPr lang="en-US" altLang="ja-JP" b="1" i="0" baseline="-25000" dirty="0">
-                <a:solidFill>
-                  <a:srgbClr val="FF0000"/>
-                </a:solidFill>
-                <a:effectLst/>
-                <a:latin typeface="Source Sans Pro" panose="020B0503030403020204" pitchFamily="34" charset="0"/>
-              </a:rPr>
-              <a:t> </a:t>
-            </a:r>
-            <a:r>
-              <a:rPr lang="en-US" altLang="ja-JP" b="1" dirty="0">
-                <a:solidFill>
-                  <a:srgbClr val="FF0000"/>
-                </a:solidFill>
-              </a:rPr>
-              <a:t>: p</a:t>
-            </a:r>
-            <a:r>
-              <a:rPr lang="en-US" altLang="ja-JP" b="1" dirty="0">
-                <a:solidFill>
-                  <a:srgbClr val="FF0000"/>
-                </a:solidFill>
-                <a:latin typeface="Source Sans Pro" panose="020B0503030403020204" pitchFamily="34" charset="0"/>
-              </a:rPr>
-              <a:t>(x|</a:t>
-            </a:r>
-            <a:r>
-              <a:rPr lang="el-GR" altLang="ja-JP" b="1" i="0" dirty="0">
-                <a:solidFill>
-                  <a:srgbClr val="FF0000"/>
-                </a:solidFill>
-                <a:effectLst/>
-                <a:latin typeface="Source Sans Pro" panose="020B0503030403020204" pitchFamily="34" charset="0"/>
-              </a:rPr>
-              <a:t>θ</a:t>
-            </a:r>
-            <a:r>
-              <a:rPr lang="en-US" altLang="ja-JP" b="1" baseline="-25000" dirty="0">
-                <a:solidFill>
-                  <a:srgbClr val="FF0000"/>
-                </a:solidFill>
-                <a:latin typeface="Source Sans Pro" panose="020B0503030403020204" pitchFamily="34" charset="0"/>
-              </a:rPr>
-              <a:t>2</a:t>
-            </a:r>
-            <a:r>
-              <a:rPr lang="en-US" altLang="ja-JP" dirty="0">
-                <a:solidFill>
-                  <a:srgbClr val="FF0000"/>
-                </a:solidFill>
-              </a:rPr>
-              <a:t>)</a:t>
-            </a:r>
-            <a:r>
-              <a:rPr lang="en-US" altLang="ja-JP" b="1" i="0" baseline="-25000" dirty="0">
-                <a:solidFill>
-                  <a:srgbClr val="FF0000"/>
-                </a:solidFill>
-                <a:effectLst/>
-                <a:latin typeface="Source Sans Pro" panose="020B0503030403020204" pitchFamily="34" charset="0"/>
-              </a:rPr>
-              <a:t> </a:t>
-            </a:r>
-            <a:r>
-              <a:rPr lang="en-US" altLang="ja-JP" b="1" dirty="0">
-                <a:solidFill>
-                  <a:srgbClr val="FF0000"/>
-                </a:solidFill>
-              </a:rPr>
-              <a:t>]</a:t>
-            </a:r>
-            <a:endParaRPr lang="en-US" altLang="ja-JP" dirty="0"/>
-          </a:p>
-          <a:p>
-            <a:pPr marL="0" indent="0">
-              <a:buNone/>
-            </a:pPr>
+              <a:t>f-divergence</a:t>
+            </a:r>
             <a:r>
               <a:rPr lang="en-US" altLang="ja-JP" dirty="0"/>
-              <a:t>when</a:t>
-            </a:r>
-            <a:r>
-              <a:rPr lang="en-US" altLang="ja-JP" b="1" dirty="0">
-                <a:solidFill>
-                  <a:srgbClr val="FF0000"/>
-                </a:solidFill>
-              </a:rPr>
-              <a:t> F(</a:t>
-            </a:r>
-            <a:r>
-              <a:rPr lang="el-GR" altLang="ja-JP" b="1" i="0" dirty="0">
-                <a:solidFill>
-                  <a:srgbClr val="FF0000"/>
-                </a:solidFill>
-                <a:effectLst/>
-                <a:latin typeface="Source Sans Pro" panose="020B0503030403020204" pitchFamily="34" charset="0"/>
-              </a:rPr>
-              <a:t>θ</a:t>
-            </a:r>
-            <a:r>
-              <a:rPr lang="en-US" altLang="ja-JP" b="1" dirty="0">
-                <a:solidFill>
-                  <a:srgbClr val="FF0000"/>
-                </a:solidFill>
-              </a:rPr>
-              <a:t>)=log </a:t>
-            </a:r>
-            <a:r>
-              <a:rPr lang="ja-JP" altLang="en-US" b="1" i="0" dirty="0">
-                <a:solidFill>
-                  <a:srgbClr val="FF0000"/>
-                </a:solidFill>
-                <a:effectLst/>
-                <a:latin typeface="Source Sans Pro" panose="020B0503030403020204" pitchFamily="34" charset="0"/>
-              </a:rPr>
-              <a:t>∫ </a:t>
-            </a:r>
-            <a:r>
-              <a:rPr lang="en-US" altLang="ja-JP" b="1" i="0" dirty="0">
-                <a:solidFill>
-                  <a:srgbClr val="FF0000"/>
-                </a:solidFill>
-                <a:effectLst/>
-                <a:latin typeface="Source Sans Pro" panose="020B0503030403020204" pitchFamily="34" charset="0"/>
-              </a:rPr>
-              <a:t>exp(&lt;x,</a:t>
-            </a:r>
-            <a:r>
-              <a:rPr lang="el-GR" altLang="ja-JP" b="1" i="0" dirty="0">
-                <a:solidFill>
-                  <a:srgbClr val="FF0000"/>
-                </a:solidFill>
-                <a:effectLst/>
-                <a:latin typeface="Source Sans Pro" panose="020B0503030403020204" pitchFamily="34" charset="0"/>
-              </a:rPr>
-              <a:t> θ </a:t>
-            </a:r>
-            <a:r>
-              <a:rPr lang="en-US" altLang="ja-JP" b="1" i="0" dirty="0">
-                <a:solidFill>
-                  <a:srgbClr val="FF0000"/>
-                </a:solidFill>
-                <a:effectLst/>
-                <a:latin typeface="Source Sans Pro" panose="020B0503030403020204" pitchFamily="34" charset="0"/>
-              </a:rPr>
-              <a:t>&gt;) d</a:t>
-            </a:r>
-            <a:r>
-              <a:rPr lang="el-GR" altLang="ja-JP" b="1" i="0" dirty="0">
-                <a:solidFill>
-                  <a:srgbClr val="FF0000"/>
-                </a:solidFill>
-                <a:effectLst/>
-                <a:latin typeface="Source Sans Pro" panose="020B0503030403020204" pitchFamily="34" charset="0"/>
-              </a:rPr>
-              <a:t>μ</a:t>
-            </a:r>
-            <a:r>
-              <a:rPr lang="en-US" altLang="ja-JP" b="1" i="0" dirty="0">
-                <a:solidFill>
-                  <a:srgbClr val="FF0000"/>
-                </a:solidFill>
-                <a:effectLst/>
-                <a:latin typeface="Source Sans Pro" panose="020B0503030403020204" pitchFamily="34" charset="0"/>
-              </a:rPr>
-              <a:t>(x) </a:t>
-            </a:r>
-            <a:r>
-              <a:rPr lang="en-US" altLang="ja-JP" i="0" dirty="0">
-                <a:effectLst/>
-                <a:latin typeface="Source Sans Pro" panose="020B0503030403020204" pitchFamily="34" charset="0"/>
-              </a:rPr>
-              <a:t>where</a:t>
-            </a:r>
-            <a:r>
-              <a:rPr lang="en-US" altLang="ja-JP" b="1" i="0" dirty="0">
-                <a:solidFill>
-                  <a:srgbClr val="FF0000"/>
-                </a:solidFill>
-                <a:effectLst/>
-                <a:latin typeface="Source Sans Pro" panose="020B0503030403020204" pitchFamily="34" charset="0"/>
-              </a:rPr>
-              <a:t> </a:t>
-            </a:r>
-            <a:r>
-              <a:rPr lang="en-US" altLang="ja-JP" b="1" dirty="0">
-                <a:solidFill>
-                  <a:srgbClr val="FF0000"/>
-                </a:solidFill>
-              </a:rPr>
-              <a:t>D</a:t>
-            </a:r>
-            <a:r>
-              <a:rPr lang="en-US" altLang="ja-JP" b="1" baseline="-25000" dirty="0">
-                <a:solidFill>
-                  <a:srgbClr val="FF0000"/>
-                </a:solidFill>
-              </a:rPr>
-              <a:t>KL</a:t>
-            </a:r>
-            <a:r>
-              <a:rPr lang="en-US" altLang="ja-JP" dirty="0">
-                <a:solidFill>
-                  <a:srgbClr val="FF0000"/>
-                </a:solidFill>
-              </a:rPr>
-              <a:t>*</a:t>
-            </a:r>
-            <a:r>
-              <a:rPr lang="en-US" altLang="ja-JP" b="1" dirty="0">
-                <a:solidFill>
-                  <a:srgbClr val="FF0000"/>
-                </a:solidFill>
-              </a:rPr>
-              <a:t>[p(x):q(x)]:= D</a:t>
-            </a:r>
-            <a:r>
-              <a:rPr lang="en-US" altLang="ja-JP" b="1" baseline="-25000" dirty="0">
-                <a:solidFill>
-                  <a:srgbClr val="FF0000"/>
-                </a:solidFill>
-              </a:rPr>
-              <a:t>KL</a:t>
-            </a:r>
-            <a:r>
-              <a:rPr lang="en-US" altLang="ja-JP" b="1" dirty="0">
-                <a:solidFill>
-                  <a:srgbClr val="FF0000"/>
-                </a:solidFill>
-              </a:rPr>
-              <a:t>[q(x):p(x)] </a:t>
-            </a:r>
-            <a:r>
-              <a:rPr lang="en-US" altLang="ja-JP" dirty="0"/>
-              <a:t>is the </a:t>
-            </a:r>
-            <a:r>
-              <a:rPr lang="en-US" altLang="ja-JP" b="1" dirty="0">
-                <a:solidFill>
-                  <a:srgbClr val="FF0000"/>
-                </a:solidFill>
-              </a:rPr>
-              <a:t>reverse </a:t>
-            </a:r>
-            <a:r>
-              <a:rPr lang="en-US" altLang="ja-JP" b="1" dirty="0" err="1">
-                <a:solidFill>
-                  <a:srgbClr val="FF0000"/>
-                </a:solidFill>
-              </a:rPr>
-              <a:t>Kullback-Leibler</a:t>
-            </a:r>
-            <a:r>
-              <a:rPr lang="en-US" altLang="ja-JP" b="1" dirty="0">
-                <a:solidFill>
-                  <a:srgbClr val="FF0000"/>
-                </a:solidFill>
-              </a:rPr>
-              <a:t> divergence</a:t>
-            </a:r>
-            <a:endParaRPr lang="en-US" altLang="ja-JP" b="1" dirty="0"/>
+              <a:t> for f(u)=-log u</a:t>
+            </a:r>
+            <a:endParaRPr kumimoji="1" lang="en-US" altLang="ja-JP" dirty="0"/>
           </a:p>
           <a:p>
             <a:endParaRPr kumimoji="1" lang="ja-JP" altLang="en-US" dirty="0"/>
@@ -2272,9 +1822,572 @@
           <a:bodyPr/>
           <a:lstStyle/>
           <a:p>
+            <a:fld id="{061BD5CE-3F97-4822-9013-BB9FF2912E0B}" type="slidenum">
+              <a:rPr kumimoji="1" lang="ja-JP" altLang="en-US" smtClean="0"/>
+              <a:t>22</a:t>
+            </a:fld>
+            <a:endParaRPr kumimoji="1" lang="ja-JP" altLang="en-US"/>
+          </a:p>
+        </p:txBody>
+      </p:sp>
+    </p:spTree>
+    <p:extLst>
+      <p:ext uri="{BB962C8B-B14F-4D97-AF65-F5344CB8AC3E}">
+        <p14:creationId xmlns:p14="http://schemas.microsoft.com/office/powerpoint/2010/main" val="3107663179"/>
+      </p:ext>
+    </p:extLst>
+  </p:cSld>
+  <p:clrMapOvr>
+    <a:masterClrMapping/>
+  </p:clrMapOvr>
+</p:notes>
+</file>
+
+<file path=ppt/notesSlides/notesSlide9.xml><?xml version="1.0" encoding="utf-8"?>
+<p:notes xmlns:a="http://schemas.openxmlformats.org/drawingml/2006/main" xmlns:r="http://schemas.openxmlformats.org/officeDocument/2006/relationships" xmlns:p="http://schemas.openxmlformats.org/presentationml/2006/main">
+  <p:cSld>
+    <p:spTree>
+      <p:nvGrpSpPr>
+        <p:cNvPr id="1" name=""/>
+        <p:cNvGrpSpPr/>
+        <p:nvPr/>
+      </p:nvGrpSpPr>
+      <p:grpSpPr>
+        <a:xfrm>
+          <a:off x="0" y="0"/>
+          <a:ext cx="0" cy="0"/>
+          <a:chOff x="0" y="0"/>
+          <a:chExt cx="0" cy="0"/>
+        </a:xfrm>
+      </p:grpSpPr>
+      <p:sp>
+        <p:nvSpPr>
+          <p:cNvPr id="2" name="Slide Image Placeholder 1"/>
+          <p:cNvSpPr>
+            <a:spLocks noGrp="1" noRot="1" noChangeAspect="1"/>
+          </p:cNvSpPr>
+          <p:nvPr>
+            <p:ph type="sldImg"/>
+          </p:nvPr>
+        </p:nvSpPr>
+        <p:spPr/>
+      </p:sp>
+      <p:sp>
+        <p:nvSpPr>
+          <p:cNvPr id="3" name="Notes Placeholder 2"/>
+          <p:cNvSpPr>
+            <a:spLocks noGrp="1"/>
+          </p:cNvSpPr>
+          <p:nvPr>
+            <p:ph type="body" idx="1"/>
+          </p:nvPr>
+        </p:nvSpPr>
+        <p:spPr/>
+        <p:txBody>
+          <a:bodyPr/>
+          <a:lstStyle/>
+          <a:p>
+            <a:r>
+              <a:rPr lang="ja-JP" altLang="en-US" b="0" i="0" dirty="0">
+                <a:solidFill>
+                  <a:srgbClr val="DF000F"/>
+                </a:solidFill>
+                <a:effectLst/>
+                <a:latin typeface="Source Sans Pro" panose="020B0503030403020204" pitchFamily="34" charset="0"/>
+              </a:rPr>
+              <a:t>∫</a:t>
+            </a:r>
+            <a:r>
+              <a:rPr lang="el-GR" altLang="ja-JP" b="0" i="0" dirty="0">
+                <a:solidFill>
+                  <a:srgbClr val="DF000F"/>
+                </a:solidFill>
+                <a:effectLst/>
+                <a:latin typeface="Source Sans Pro" panose="020B0503030403020204" pitchFamily="34" charset="0"/>
+              </a:rPr>
+              <a:t>μ</a:t>
+            </a:r>
+            <a:endParaRPr lang="en-US" altLang="ja-JP" b="0" i="0" dirty="0">
+              <a:solidFill>
+                <a:srgbClr val="DF000F"/>
+              </a:solidFill>
+              <a:effectLst/>
+              <a:latin typeface="Source Sans Pro" panose="020B0503030403020204" pitchFamily="34" charset="0"/>
+            </a:endParaRPr>
+          </a:p>
+          <a:p>
+            <a:r>
+              <a:rPr lang="ja-JP" altLang="en-US" b="0" i="0" dirty="0">
+                <a:solidFill>
+                  <a:srgbClr val="DF000F"/>
+                </a:solidFill>
+                <a:effectLst/>
+                <a:latin typeface="Source Sans Pro" panose="020B0503030403020204" pitchFamily="34" charset="0"/>
+              </a:rPr>
+              <a:t>∇</a:t>
+            </a:r>
+            <a:r>
+              <a:rPr lang="en-US" altLang="ja-JP" b="0" i="0" dirty="0">
+                <a:solidFill>
+                  <a:srgbClr val="DF000F"/>
+                </a:solidFill>
+                <a:effectLst/>
+                <a:latin typeface="Source Sans Pro" panose="020B0503030403020204" pitchFamily="34" charset="0"/>
+              </a:rPr>
+              <a:t>F easy!</a:t>
+            </a:r>
+          </a:p>
+          <a:p>
+            <a:endParaRPr kumimoji="1" lang="en-US" altLang="ja-JP" b="0" i="0" dirty="0">
+              <a:solidFill>
+                <a:srgbClr val="DF000F"/>
+              </a:solidFill>
+              <a:effectLst/>
+              <a:latin typeface="Source Sans Pro" panose="020B0503030403020204" pitchFamily="34" charset="0"/>
+            </a:endParaRPr>
+          </a:p>
+          <a:p>
+            <a:r>
+              <a:rPr lang="en-US" altLang="ja-JP" dirty="0"/>
+              <a:t>Information geometry proves that </a:t>
+            </a:r>
+            <a:r>
+              <a:rPr lang="en-US" altLang="ja-JP" b="1" dirty="0">
+                <a:solidFill>
+                  <a:srgbClr val="FF0000"/>
+                </a:solidFill>
+              </a:rPr>
+              <a:t>B</a:t>
+            </a:r>
+            <a:r>
+              <a:rPr lang="en-US" altLang="ja-JP" b="1" baseline="-25000" dirty="0">
+                <a:solidFill>
+                  <a:srgbClr val="FF0000"/>
+                </a:solidFill>
+              </a:rPr>
+              <a:t>F</a:t>
+            </a:r>
+            <a:r>
+              <a:rPr lang="en-US" altLang="ja-JP" b="1" dirty="0">
+                <a:solidFill>
+                  <a:srgbClr val="FF0000"/>
+                </a:solidFill>
+              </a:rPr>
+              <a:t>(</a:t>
+            </a:r>
+            <a:r>
+              <a:rPr lang="el-GR" altLang="ja-JP" b="1" i="0" dirty="0">
+                <a:solidFill>
+                  <a:srgbClr val="FF0000"/>
+                </a:solidFill>
+                <a:effectLst/>
+                <a:latin typeface="Source Sans Pro" panose="020B0503030403020204" pitchFamily="34" charset="0"/>
+              </a:rPr>
+              <a:t>θ</a:t>
+            </a:r>
+            <a:r>
+              <a:rPr lang="en-US" altLang="ja-JP" b="1" i="0" baseline="-25000" dirty="0">
+                <a:solidFill>
+                  <a:srgbClr val="FF0000"/>
+                </a:solidFill>
+                <a:effectLst/>
+                <a:latin typeface="Source Sans Pro" panose="020B0503030403020204" pitchFamily="34" charset="0"/>
+              </a:rPr>
+              <a:t>1</a:t>
+            </a:r>
+            <a:r>
+              <a:rPr lang="el-GR" altLang="ja-JP" b="1" i="0" dirty="0">
+                <a:solidFill>
+                  <a:srgbClr val="FF0000"/>
+                </a:solidFill>
+                <a:effectLst/>
+                <a:latin typeface="Source Sans Pro" panose="020B0503030403020204" pitchFamily="34" charset="0"/>
+              </a:rPr>
+              <a:t> </a:t>
+            </a:r>
+            <a:r>
+              <a:rPr lang="en-US" altLang="ja-JP" b="1" dirty="0">
+                <a:solidFill>
+                  <a:srgbClr val="FF0000"/>
+                </a:solidFill>
+              </a:rPr>
+              <a:t>:</a:t>
+            </a:r>
+            <a:r>
+              <a:rPr lang="el-GR" altLang="ja-JP" b="1" i="0" dirty="0">
+                <a:solidFill>
+                  <a:srgbClr val="FF0000"/>
+                </a:solidFill>
+                <a:effectLst/>
+                <a:latin typeface="Source Sans Pro" panose="020B0503030403020204" pitchFamily="34" charset="0"/>
+              </a:rPr>
+              <a:t> θ</a:t>
+            </a:r>
+            <a:r>
+              <a:rPr lang="en-US" altLang="ja-JP" b="1" i="0" baseline="-25000" dirty="0">
+                <a:solidFill>
+                  <a:srgbClr val="FF0000"/>
+                </a:solidFill>
+                <a:effectLst/>
+                <a:latin typeface="Source Sans Pro" panose="020B0503030403020204" pitchFamily="34" charset="0"/>
+              </a:rPr>
+              <a:t>2</a:t>
+            </a:r>
+            <a:r>
+              <a:rPr lang="en-US" altLang="ja-JP" b="1" dirty="0">
+                <a:solidFill>
+                  <a:srgbClr val="FF0000"/>
+                </a:solidFill>
+              </a:rPr>
+              <a:t>)= D</a:t>
+            </a:r>
+            <a:r>
+              <a:rPr lang="en-US" altLang="ja-JP" b="1" baseline="-25000" dirty="0">
+                <a:solidFill>
+                  <a:srgbClr val="FF0000"/>
+                </a:solidFill>
+              </a:rPr>
+              <a:t>KL</a:t>
+            </a:r>
+            <a:r>
+              <a:rPr lang="en-US" altLang="ja-JP" dirty="0">
+                <a:solidFill>
+                  <a:srgbClr val="FF0000"/>
+                </a:solidFill>
+              </a:rPr>
+              <a:t>*</a:t>
+            </a:r>
+            <a:r>
+              <a:rPr lang="en-US" altLang="ja-JP" b="1" dirty="0">
+                <a:solidFill>
+                  <a:srgbClr val="FF0000"/>
+                </a:solidFill>
+              </a:rPr>
+              <a:t>[p</a:t>
+            </a:r>
+            <a:r>
+              <a:rPr lang="en-US" altLang="ja-JP" b="1" dirty="0">
+                <a:solidFill>
+                  <a:srgbClr val="FF0000"/>
+                </a:solidFill>
+                <a:latin typeface="Source Sans Pro" panose="020B0503030403020204" pitchFamily="34" charset="0"/>
+              </a:rPr>
+              <a:t>(x|</a:t>
+            </a:r>
+            <a:r>
+              <a:rPr lang="el-GR" altLang="ja-JP" b="1" i="0" dirty="0">
+                <a:solidFill>
+                  <a:srgbClr val="FF0000"/>
+                </a:solidFill>
+                <a:effectLst/>
+                <a:latin typeface="Source Sans Pro" panose="020B0503030403020204" pitchFamily="34" charset="0"/>
+              </a:rPr>
+              <a:t>θ</a:t>
+            </a:r>
+            <a:r>
+              <a:rPr lang="en-US" altLang="ja-JP" b="1" i="0" baseline="-25000" dirty="0">
+                <a:solidFill>
+                  <a:srgbClr val="FF0000"/>
+                </a:solidFill>
+                <a:effectLst/>
+                <a:latin typeface="Source Sans Pro" panose="020B0503030403020204" pitchFamily="34" charset="0"/>
+              </a:rPr>
+              <a:t>1</a:t>
+            </a:r>
+            <a:r>
+              <a:rPr lang="en-US" altLang="ja-JP" dirty="0">
+                <a:solidFill>
+                  <a:srgbClr val="FF0000"/>
+                </a:solidFill>
+              </a:rPr>
+              <a:t>)</a:t>
+            </a:r>
+            <a:r>
+              <a:rPr lang="en-US" altLang="ja-JP" b="1" i="0" baseline="-25000" dirty="0">
+                <a:solidFill>
+                  <a:srgbClr val="FF0000"/>
+                </a:solidFill>
+                <a:effectLst/>
+                <a:latin typeface="Source Sans Pro" panose="020B0503030403020204" pitchFamily="34" charset="0"/>
+              </a:rPr>
+              <a:t> </a:t>
+            </a:r>
+            <a:r>
+              <a:rPr lang="en-US" altLang="ja-JP" b="1" dirty="0">
+                <a:solidFill>
+                  <a:srgbClr val="FF0000"/>
+                </a:solidFill>
+              </a:rPr>
+              <a:t>: p</a:t>
+            </a:r>
+            <a:r>
+              <a:rPr lang="en-US" altLang="ja-JP" b="1" dirty="0">
+                <a:solidFill>
+                  <a:srgbClr val="FF0000"/>
+                </a:solidFill>
+                <a:latin typeface="Source Sans Pro" panose="020B0503030403020204" pitchFamily="34" charset="0"/>
+              </a:rPr>
+              <a:t>(x|</a:t>
+            </a:r>
+            <a:r>
+              <a:rPr lang="el-GR" altLang="ja-JP" b="1" i="0" dirty="0">
+                <a:solidFill>
+                  <a:srgbClr val="FF0000"/>
+                </a:solidFill>
+                <a:effectLst/>
+                <a:latin typeface="Source Sans Pro" panose="020B0503030403020204" pitchFamily="34" charset="0"/>
+              </a:rPr>
+              <a:t>θ</a:t>
+            </a:r>
+            <a:r>
+              <a:rPr lang="en-US" altLang="ja-JP" b="1" baseline="-25000" dirty="0">
+                <a:solidFill>
+                  <a:srgbClr val="FF0000"/>
+                </a:solidFill>
+                <a:latin typeface="Source Sans Pro" panose="020B0503030403020204" pitchFamily="34" charset="0"/>
+              </a:rPr>
+              <a:t>2</a:t>
+            </a:r>
+            <a:r>
+              <a:rPr lang="en-US" altLang="ja-JP" dirty="0">
+                <a:solidFill>
+                  <a:srgbClr val="FF0000"/>
+                </a:solidFill>
+              </a:rPr>
+              <a:t>)</a:t>
+            </a:r>
+            <a:r>
+              <a:rPr lang="en-US" altLang="ja-JP" b="1" i="0" baseline="-25000" dirty="0">
+                <a:solidFill>
+                  <a:srgbClr val="FF0000"/>
+                </a:solidFill>
+                <a:effectLst/>
+                <a:latin typeface="Source Sans Pro" panose="020B0503030403020204" pitchFamily="34" charset="0"/>
+              </a:rPr>
+              <a:t> </a:t>
+            </a:r>
+            <a:r>
+              <a:rPr lang="en-US" altLang="ja-JP" b="1" dirty="0">
+                <a:solidFill>
+                  <a:srgbClr val="FF0000"/>
+                </a:solidFill>
+              </a:rPr>
+              <a:t>]</a:t>
+            </a:r>
+            <a:endParaRPr lang="en-US" altLang="ja-JP" dirty="0"/>
+          </a:p>
+          <a:p>
+            <a:pPr marL="0" indent="0">
+              <a:buNone/>
+            </a:pPr>
+            <a:r>
+              <a:rPr lang="en-US" altLang="ja-JP" dirty="0"/>
+              <a:t>when</a:t>
+            </a:r>
+            <a:r>
+              <a:rPr lang="en-US" altLang="ja-JP" b="1" dirty="0">
+                <a:solidFill>
+                  <a:srgbClr val="FF0000"/>
+                </a:solidFill>
+              </a:rPr>
+              <a:t> F(</a:t>
+            </a:r>
+            <a:r>
+              <a:rPr lang="el-GR" altLang="ja-JP" b="1" i="0" dirty="0">
+                <a:solidFill>
+                  <a:srgbClr val="FF0000"/>
+                </a:solidFill>
+                <a:effectLst/>
+                <a:latin typeface="Source Sans Pro" panose="020B0503030403020204" pitchFamily="34" charset="0"/>
+              </a:rPr>
+              <a:t>θ</a:t>
+            </a:r>
+            <a:r>
+              <a:rPr lang="en-US" altLang="ja-JP" b="1" dirty="0">
+                <a:solidFill>
+                  <a:srgbClr val="FF0000"/>
+                </a:solidFill>
+              </a:rPr>
+              <a:t>)=log </a:t>
+            </a:r>
+            <a:r>
+              <a:rPr lang="ja-JP" altLang="en-US" b="1" i="0" dirty="0">
+                <a:solidFill>
+                  <a:srgbClr val="FF0000"/>
+                </a:solidFill>
+                <a:effectLst/>
+                <a:latin typeface="Source Sans Pro" panose="020B0503030403020204" pitchFamily="34" charset="0"/>
+              </a:rPr>
+              <a:t>∫ </a:t>
+            </a:r>
+            <a:r>
+              <a:rPr lang="en-US" altLang="ja-JP" b="1" i="0" dirty="0">
+                <a:solidFill>
+                  <a:srgbClr val="FF0000"/>
+                </a:solidFill>
+                <a:effectLst/>
+                <a:latin typeface="Source Sans Pro" panose="020B0503030403020204" pitchFamily="34" charset="0"/>
+              </a:rPr>
+              <a:t>exp(&lt;x,</a:t>
+            </a:r>
+            <a:r>
+              <a:rPr lang="el-GR" altLang="ja-JP" b="1" i="0" dirty="0">
+                <a:solidFill>
+                  <a:srgbClr val="FF0000"/>
+                </a:solidFill>
+                <a:effectLst/>
+                <a:latin typeface="Source Sans Pro" panose="020B0503030403020204" pitchFamily="34" charset="0"/>
+              </a:rPr>
+              <a:t> θ </a:t>
+            </a:r>
+            <a:r>
+              <a:rPr lang="en-US" altLang="ja-JP" b="1" i="0" dirty="0">
+                <a:solidFill>
+                  <a:srgbClr val="FF0000"/>
+                </a:solidFill>
+                <a:effectLst/>
+                <a:latin typeface="Source Sans Pro" panose="020B0503030403020204" pitchFamily="34" charset="0"/>
+              </a:rPr>
+              <a:t>&gt;) d</a:t>
+            </a:r>
+            <a:r>
+              <a:rPr lang="el-GR" altLang="ja-JP" b="1" i="0" dirty="0">
+                <a:solidFill>
+                  <a:srgbClr val="FF0000"/>
+                </a:solidFill>
+                <a:effectLst/>
+                <a:latin typeface="Source Sans Pro" panose="020B0503030403020204" pitchFamily="34" charset="0"/>
+              </a:rPr>
+              <a:t>μ</a:t>
+            </a:r>
+            <a:r>
+              <a:rPr lang="en-US" altLang="ja-JP" b="1" i="0" dirty="0">
+                <a:solidFill>
+                  <a:srgbClr val="FF0000"/>
+                </a:solidFill>
+                <a:effectLst/>
+                <a:latin typeface="Source Sans Pro" panose="020B0503030403020204" pitchFamily="34" charset="0"/>
+              </a:rPr>
+              <a:t>(x) </a:t>
+            </a:r>
+            <a:r>
+              <a:rPr lang="en-US" altLang="ja-JP" i="0" dirty="0">
+                <a:effectLst/>
+                <a:latin typeface="Source Sans Pro" panose="020B0503030403020204" pitchFamily="34" charset="0"/>
+              </a:rPr>
+              <a:t>where</a:t>
+            </a:r>
+            <a:r>
+              <a:rPr lang="en-US" altLang="ja-JP" b="1" i="0" dirty="0">
+                <a:solidFill>
+                  <a:srgbClr val="FF0000"/>
+                </a:solidFill>
+                <a:effectLst/>
+                <a:latin typeface="Source Sans Pro" panose="020B0503030403020204" pitchFamily="34" charset="0"/>
+              </a:rPr>
+              <a:t> </a:t>
+            </a:r>
+            <a:r>
+              <a:rPr lang="en-US" altLang="ja-JP" b="1" dirty="0">
+                <a:solidFill>
+                  <a:srgbClr val="FF0000"/>
+                </a:solidFill>
+              </a:rPr>
+              <a:t>D</a:t>
+            </a:r>
+            <a:r>
+              <a:rPr lang="en-US" altLang="ja-JP" b="1" baseline="-25000" dirty="0">
+                <a:solidFill>
+                  <a:srgbClr val="FF0000"/>
+                </a:solidFill>
+              </a:rPr>
+              <a:t>KL</a:t>
+            </a:r>
+            <a:r>
+              <a:rPr lang="en-US" altLang="ja-JP" dirty="0">
+                <a:solidFill>
+                  <a:srgbClr val="FF0000"/>
+                </a:solidFill>
+              </a:rPr>
+              <a:t>*</a:t>
+            </a:r>
+            <a:r>
+              <a:rPr lang="en-US" altLang="ja-JP" b="1" dirty="0">
+                <a:solidFill>
+                  <a:srgbClr val="FF0000"/>
+                </a:solidFill>
+              </a:rPr>
+              <a:t>[p(x):q(x)]:= D</a:t>
+            </a:r>
+            <a:r>
+              <a:rPr lang="en-US" altLang="ja-JP" b="1" baseline="-25000" dirty="0">
+                <a:solidFill>
+                  <a:srgbClr val="FF0000"/>
+                </a:solidFill>
+              </a:rPr>
+              <a:t>KL</a:t>
+            </a:r>
+            <a:r>
+              <a:rPr lang="en-US" altLang="ja-JP" b="1" dirty="0">
+                <a:solidFill>
+                  <a:srgbClr val="FF0000"/>
+                </a:solidFill>
+              </a:rPr>
+              <a:t>[q(x):p(x)] </a:t>
+            </a:r>
+            <a:r>
+              <a:rPr lang="en-US" altLang="ja-JP" dirty="0"/>
+              <a:t>is the </a:t>
+            </a:r>
+            <a:r>
+              <a:rPr lang="en-US" altLang="ja-JP" b="1" dirty="0">
+                <a:solidFill>
+                  <a:srgbClr val="FF0000"/>
+                </a:solidFill>
+              </a:rPr>
+              <a:t>reverse </a:t>
+            </a:r>
+            <a:r>
+              <a:rPr lang="en-US" altLang="ja-JP" b="1" dirty="0" err="1">
+                <a:solidFill>
+                  <a:srgbClr val="FF0000"/>
+                </a:solidFill>
+              </a:rPr>
+              <a:t>Kullback-Leibler</a:t>
+            </a:r>
+            <a:r>
+              <a:rPr lang="en-US" altLang="ja-JP" b="1" dirty="0">
+                <a:solidFill>
+                  <a:srgbClr val="FF0000"/>
+                </a:solidFill>
+              </a:rPr>
+              <a:t> divergence</a:t>
+            </a:r>
+            <a:endParaRPr lang="en-US" altLang="ja-JP" b="1" dirty="0"/>
+          </a:p>
+          <a:p>
+            <a:endParaRPr kumimoji="1" lang="ja-JP" altLang="en-US" dirty="0"/>
+          </a:p>
+        </p:txBody>
+      </p:sp>
+      <p:sp>
+        <p:nvSpPr>
+          <p:cNvPr id="4" name="Slide Number Placeholder 3"/>
+          <p:cNvSpPr>
+            <a:spLocks noGrp="1"/>
+          </p:cNvSpPr>
+          <p:nvPr>
+            <p:ph type="sldNum" sz="quarter" idx="5"/>
+          </p:nvPr>
+        </p:nvSpPr>
+        <p:spPr/>
+        <p:txBody>
+          <a:bodyPr/>
+          <a:lstStyle/>
+          <a:p>
             <a:fld id="{1474D204-4D42-4A31-949B-526B9FFFD34E}" type="slidenum">
               <a:rPr kumimoji="1" lang="ja-JP" altLang="en-US" smtClean="0"/>
-              <a:t>22</a:t>
+              <a:t>23</a:t>
             </a:fld>
             <a:endParaRPr kumimoji="1" lang="ja-JP" altLang="en-US"/>
           </a:p>
@@ -2442,7 +2555,7 @@
           <a:p>
             <a:fld id="{1D54AC14-42AC-4F61-87D6-0D6F6CB19D6C}" type="datetimeFigureOut">
               <a:rPr kumimoji="1" lang="ja-JP" altLang="en-US" smtClean="0"/>
-              <a:t>2026/4/7</a:t>
+              <a:t>2026/7/7</a:t>
             </a:fld>
             <a:endParaRPr kumimoji="1" lang="ja-JP" altLang="en-US"/>
           </a:p>
@@ -2642,7 +2755,7 @@
           <a:p>
             <a:fld id="{1D54AC14-42AC-4F61-87D6-0D6F6CB19D6C}" type="datetimeFigureOut">
               <a:rPr kumimoji="1" lang="ja-JP" altLang="en-US" smtClean="0"/>
-              <a:t>2026/4/7</a:t>
+              <a:t>2026/7/7</a:t>
             </a:fld>
             <a:endParaRPr kumimoji="1" lang="ja-JP" altLang="en-US"/>
           </a:p>
@@ -2852,7 +2965,7 @@
           <a:p>
             <a:fld id="{1D54AC14-42AC-4F61-87D6-0D6F6CB19D6C}" type="datetimeFigureOut">
               <a:rPr kumimoji="1" lang="ja-JP" altLang="en-US" smtClean="0"/>
-              <a:t>2026/4/7</a:t>
+              <a:t>2026/7/7</a:t>
             </a:fld>
             <a:endParaRPr kumimoji="1" lang="ja-JP" altLang="en-US"/>
           </a:p>
@@ -3052,7 +3165,7 @@
           <a:p>
             <a:fld id="{1D54AC14-42AC-4F61-87D6-0D6F6CB19D6C}" type="datetimeFigureOut">
               <a:rPr kumimoji="1" lang="ja-JP" altLang="en-US" smtClean="0"/>
-              <a:t>2026/4/7</a:t>
+              <a:t>2026/7/7</a:t>
             </a:fld>
             <a:endParaRPr kumimoji="1" lang="ja-JP" altLang="en-US"/>
           </a:p>
@@ -3328,7 +3441,7 @@
           <a:p>
             <a:fld id="{1D54AC14-42AC-4F61-87D6-0D6F6CB19D6C}" type="datetimeFigureOut">
               <a:rPr kumimoji="1" lang="ja-JP" altLang="en-US" smtClean="0"/>
-              <a:t>2026/4/7</a:t>
+              <a:t>2026/7/7</a:t>
             </a:fld>
             <a:endParaRPr kumimoji="1" lang="ja-JP" altLang="en-US"/>
           </a:p>
@@ -3596,7 +3709,7 @@
           <a:p>
             <a:fld id="{1D54AC14-42AC-4F61-87D6-0D6F6CB19D6C}" type="datetimeFigureOut">
               <a:rPr kumimoji="1" lang="ja-JP" altLang="en-US" smtClean="0"/>
-              <a:t>2026/4/7</a:t>
+              <a:t>2026/7/7</a:t>
             </a:fld>
             <a:endParaRPr kumimoji="1" lang="ja-JP" altLang="en-US"/>
           </a:p>
@@ -4011,7 +4124,7 @@
           <a:p>
             <a:fld id="{1D54AC14-42AC-4F61-87D6-0D6F6CB19D6C}" type="datetimeFigureOut">
               <a:rPr kumimoji="1" lang="ja-JP" altLang="en-US" smtClean="0"/>
-              <a:t>2026/4/7</a:t>
+              <a:t>2026/7/7</a:t>
             </a:fld>
             <a:endParaRPr kumimoji="1" lang="ja-JP" altLang="en-US"/>
           </a:p>
@@ -4153,7 +4266,7 @@
           <a:p>
             <a:fld id="{1D54AC14-42AC-4F61-87D6-0D6F6CB19D6C}" type="datetimeFigureOut">
               <a:rPr kumimoji="1" lang="ja-JP" altLang="en-US" smtClean="0"/>
-              <a:t>2026/4/7</a:t>
+              <a:t>2026/7/7</a:t>
             </a:fld>
             <a:endParaRPr kumimoji="1" lang="ja-JP" altLang="en-US"/>
           </a:p>
@@ -4266,7 +4379,7 @@
           <a:p>
             <a:fld id="{1D54AC14-42AC-4F61-87D6-0D6F6CB19D6C}" type="datetimeFigureOut">
               <a:rPr kumimoji="1" lang="ja-JP" altLang="en-US" smtClean="0"/>
-              <a:t>2026/4/7</a:t>
+              <a:t>2026/7/7</a:t>
             </a:fld>
             <a:endParaRPr kumimoji="1" lang="ja-JP" altLang="en-US"/>
           </a:p>
@@ -4579,7 +4692,7 @@
           <a:p>
             <a:fld id="{1D54AC14-42AC-4F61-87D6-0D6F6CB19D6C}" type="datetimeFigureOut">
               <a:rPr kumimoji="1" lang="ja-JP" altLang="en-US" smtClean="0"/>
-              <a:t>2026/4/7</a:t>
+              <a:t>2026/7/7</a:t>
             </a:fld>
             <a:endParaRPr kumimoji="1" lang="ja-JP" altLang="en-US"/>
           </a:p>
@@ -4868,7 +4981,7 @@
           <a:p>
             <a:fld id="{1D54AC14-42AC-4F61-87D6-0D6F6CB19D6C}" type="datetimeFigureOut">
               <a:rPr kumimoji="1" lang="ja-JP" altLang="en-US" smtClean="0"/>
-              <a:t>2026/4/7</a:t>
+              <a:t>2026/7/7</a:t>
             </a:fld>
             <a:endParaRPr kumimoji="1" lang="ja-JP" altLang="en-US"/>
           </a:p>
@@ -5111,7 +5224,7 @@
           <a:p>
             <a:fld id="{1D54AC14-42AC-4F61-87D6-0D6F6CB19D6C}" type="datetimeFigureOut">
               <a:rPr kumimoji="1" lang="ja-JP" altLang="en-US" smtClean="0"/>
-              <a:t>2026/4/7</a:t>
+              <a:t>2026/7/7</a:t>
             </a:fld>
             <a:endParaRPr kumimoji="1" lang="ja-JP" altLang="en-US"/>
           </a:p>
@@ -5900,6 +6013,484 @@
           <a:chExt cx="0" cy="0"/>
         </a:xfrm>
       </p:grpSpPr>
+      <p:sp>
+        <p:nvSpPr>
+          <p:cNvPr id="2" name="Title 1">
+            <a:extLst>
+              <a:ext uri="{FF2B5EF4-FFF2-40B4-BE49-F238E27FC236}">
+                <a16:creationId xmlns:a16="http://schemas.microsoft.com/office/drawing/2014/main" id="{72ACF8DF-06D7-0751-02E2-4AE545A796D4}"/>
+              </a:ext>
+            </a:extLst>
+          </p:cNvPr>
+          <p:cNvSpPr>
+            <a:spLocks noGrp="1"/>
+          </p:cNvSpPr>
+          <p:nvPr>
+            <p:ph type="title"/>
+          </p:nvPr>
+        </p:nvSpPr>
+        <p:spPr>
+          <a:xfrm>
+            <a:off x="122146" y="-28193"/>
+            <a:ext cx="10515600" cy="1325563"/>
+          </a:xfrm>
+        </p:spPr>
+        <p:txBody>
+          <a:bodyPr/>
+          <a:lstStyle/>
+          <a:p>
+            <a:r>
+              <a:rPr kumimoji="1" lang="en-US" altLang="ja-JP" b="1" dirty="0">
+                <a:solidFill>
+                  <a:schemeClr val="accent4"/>
+                </a:solidFill>
+              </a:rPr>
+              <a:t>Curved Bregman divergences (</a:t>
+            </a:r>
+            <a:r>
+              <a:rPr kumimoji="1" lang="en-US" altLang="ja-JP" b="1" dirty="0" err="1">
+                <a:solidFill>
+                  <a:schemeClr val="accent4"/>
+                </a:solidFill>
+              </a:rPr>
+              <a:t>cBDs</a:t>
+            </a:r>
+            <a:r>
+              <a:rPr kumimoji="1" lang="en-US" altLang="ja-JP" b="1" dirty="0">
+                <a:solidFill>
+                  <a:schemeClr val="accent4"/>
+                </a:solidFill>
+              </a:rPr>
+              <a:t>)</a:t>
+            </a:r>
+            <a:endParaRPr kumimoji="1" lang="ja-JP" altLang="en-US" b="1" dirty="0">
+              <a:solidFill>
+                <a:schemeClr val="accent4"/>
+              </a:solidFill>
+            </a:endParaRPr>
+          </a:p>
+        </p:txBody>
+      </p:sp>
+      <p:sp>
+        <p:nvSpPr>
+          <p:cNvPr id="3" name="Content Placeholder 2">
+            <a:extLst>
+              <a:ext uri="{FF2B5EF4-FFF2-40B4-BE49-F238E27FC236}">
+                <a16:creationId xmlns:a16="http://schemas.microsoft.com/office/drawing/2014/main" id="{9C97A531-0B0F-8C0C-AFCE-774C3FDD4DE3}"/>
+              </a:ext>
+            </a:extLst>
+          </p:cNvPr>
+          <p:cNvSpPr>
+            <a:spLocks noGrp="1"/>
+          </p:cNvSpPr>
+          <p:nvPr>
+            <p:ph idx="1"/>
+          </p:nvPr>
+        </p:nvSpPr>
+        <p:spPr>
+          <a:xfrm>
+            <a:off x="177089" y="976323"/>
+            <a:ext cx="11798015" cy="2353871"/>
+          </a:xfrm>
+        </p:spPr>
+        <p:txBody>
+          <a:bodyPr/>
+          <a:lstStyle/>
+          <a:p>
+            <a:pPr marL="0" indent="0">
+              <a:buNone/>
+            </a:pPr>
+            <a:r>
+              <a:rPr lang="en-US" altLang="ja-JP" sz="2800" dirty="0"/>
+              <a:t>Consider a domain U which maps to a subset of </a:t>
+            </a:r>
+            <a:r>
+              <a:rPr lang="el-GR" altLang="ja-JP" i="0" dirty="0">
+                <a:effectLst/>
+                <a:latin typeface="Source Sans Pro" panose="020B0503030403020204" pitchFamily="34" charset="0"/>
+              </a:rPr>
+              <a:t>Θ</a:t>
+            </a:r>
+            <a:r>
+              <a:rPr lang="en-US" altLang="ja-JP" sz="2800" dirty="0"/>
+              <a:t>  by  </a:t>
+            </a:r>
+            <a:r>
+              <a:rPr lang="el-GR" altLang="ja-JP" sz="2800" i="0" dirty="0">
+                <a:effectLst/>
+                <a:latin typeface="Source Sans Pro" panose="020B0503030403020204" pitchFamily="34" charset="0"/>
+              </a:rPr>
+              <a:t>θ </a:t>
+            </a:r>
+            <a:r>
+              <a:rPr lang="en-US" altLang="ja-JP" sz="2800" i="0" dirty="0">
+                <a:effectLst/>
+                <a:latin typeface="Source Sans Pro" panose="020B0503030403020204" pitchFamily="34" charset="0"/>
+              </a:rPr>
+              <a:t>=</a:t>
+            </a:r>
+            <a:r>
+              <a:rPr lang="en-US" altLang="ja-JP" sz="2800" dirty="0"/>
+              <a:t>c(</a:t>
+            </a:r>
+            <a:r>
+              <a:rPr lang="en-US" altLang="ja-JP" dirty="0">
+                <a:latin typeface="Source Sans Pro" panose="020B0503030403020204" pitchFamily="34" charset="0"/>
+              </a:rPr>
+              <a:t>u</a:t>
+            </a:r>
+            <a:r>
+              <a:rPr lang="en-US" altLang="ja-JP" sz="2800" dirty="0"/>
+              <a:t>) </a:t>
+            </a:r>
+            <a:r>
+              <a:rPr lang="en-US" altLang="ja-JP" dirty="0"/>
+              <a:t>with </a:t>
+            </a:r>
+            <a:r>
+              <a:rPr lang="en-US" altLang="ja-JP" b="1" dirty="0"/>
+              <a:t>dim(U) &lt; dim(</a:t>
+            </a:r>
+            <a:r>
+              <a:rPr lang="el-GR" altLang="ja-JP" b="1" i="0" dirty="0">
+                <a:effectLst/>
+                <a:latin typeface="Source Sans Pro" panose="020B0503030403020204" pitchFamily="34" charset="0"/>
+              </a:rPr>
+              <a:t>Θ</a:t>
+            </a:r>
+            <a:r>
+              <a:rPr lang="en-US" altLang="ja-JP" b="1" dirty="0"/>
+              <a:t>) </a:t>
+            </a:r>
+            <a:r>
+              <a:rPr lang="en-US" altLang="ja-JP" sz="2800" dirty="0"/>
+              <a:t>: </a:t>
+            </a:r>
+            <a:r>
+              <a:rPr lang="en-US" altLang="ja-JP" sz="2800" b="1" dirty="0" err="1">
+                <a:solidFill>
+                  <a:srgbClr val="FF0000"/>
+                </a:solidFill>
+              </a:rPr>
+              <a:t>B</a:t>
+            </a:r>
+            <a:r>
+              <a:rPr lang="en-US" altLang="ja-JP" sz="2800" b="1" baseline="-25000" dirty="0" err="1">
+                <a:solidFill>
+                  <a:srgbClr val="FF0000"/>
+                </a:solidFill>
+              </a:rPr>
+              <a:t>F,c</a:t>
+            </a:r>
+            <a:r>
+              <a:rPr lang="en-US" altLang="ja-JP" sz="2800" b="1" dirty="0">
+                <a:solidFill>
+                  <a:srgbClr val="FF0000"/>
+                </a:solidFill>
+              </a:rPr>
+              <a:t>(</a:t>
+            </a:r>
+            <a:r>
+              <a:rPr lang="en-US" altLang="ja-JP" b="1" dirty="0">
+                <a:solidFill>
+                  <a:srgbClr val="FF0000"/>
+                </a:solidFill>
+                <a:latin typeface="Source Sans Pro" panose="020B0503030403020204" pitchFamily="34" charset="0"/>
+              </a:rPr>
+              <a:t>u</a:t>
+            </a:r>
+            <a:r>
+              <a:rPr lang="en-US" altLang="ja-JP" sz="2800" b="1" i="0" baseline="-25000" dirty="0">
+                <a:solidFill>
+                  <a:srgbClr val="FF0000"/>
+                </a:solidFill>
+                <a:effectLst/>
+                <a:latin typeface="Source Sans Pro" panose="020B0503030403020204" pitchFamily="34" charset="0"/>
+              </a:rPr>
+              <a:t>1</a:t>
+            </a:r>
+            <a:r>
+              <a:rPr lang="el-GR" altLang="ja-JP" sz="2800" b="1" i="0" dirty="0">
+                <a:solidFill>
+                  <a:srgbClr val="FF0000"/>
+                </a:solidFill>
+                <a:effectLst/>
+                <a:latin typeface="Source Sans Pro" panose="020B0503030403020204" pitchFamily="34" charset="0"/>
+              </a:rPr>
+              <a:t> </a:t>
+            </a:r>
+            <a:r>
+              <a:rPr lang="en-US" altLang="ja-JP" sz="2800" b="1" dirty="0">
+                <a:solidFill>
+                  <a:srgbClr val="FF0000"/>
+                </a:solidFill>
+              </a:rPr>
+              <a:t>:</a:t>
+            </a:r>
+            <a:r>
+              <a:rPr lang="el-GR" altLang="ja-JP" sz="2800" b="1" i="0" dirty="0">
+                <a:solidFill>
+                  <a:srgbClr val="FF0000"/>
+                </a:solidFill>
+                <a:effectLst/>
+                <a:latin typeface="Source Sans Pro" panose="020B0503030403020204" pitchFamily="34" charset="0"/>
+              </a:rPr>
+              <a:t> </a:t>
+            </a:r>
+            <a:r>
+              <a:rPr lang="en-US" altLang="ja-JP" sz="2800" b="1" i="0" dirty="0">
+                <a:solidFill>
+                  <a:srgbClr val="FF0000"/>
+                </a:solidFill>
+                <a:effectLst/>
+                <a:latin typeface="Source Sans Pro" panose="020B0503030403020204" pitchFamily="34" charset="0"/>
+              </a:rPr>
+              <a:t>u</a:t>
+            </a:r>
+            <a:r>
+              <a:rPr lang="en-US" altLang="ja-JP" sz="2800" b="1" i="0" baseline="-25000" dirty="0">
+                <a:solidFill>
+                  <a:srgbClr val="FF0000"/>
+                </a:solidFill>
+                <a:effectLst/>
+                <a:latin typeface="Source Sans Pro" panose="020B0503030403020204" pitchFamily="34" charset="0"/>
+              </a:rPr>
+              <a:t>2</a:t>
+            </a:r>
+            <a:r>
+              <a:rPr lang="en-US" altLang="ja-JP" sz="2800" b="1" dirty="0">
+                <a:solidFill>
+                  <a:srgbClr val="FF0000"/>
+                </a:solidFill>
+              </a:rPr>
+              <a:t>) </a:t>
+            </a:r>
+            <a:r>
+              <a:rPr lang="en-US" altLang="ja-JP" sz="2800" b="1" dirty="0"/>
+              <a:t>:= B</a:t>
+            </a:r>
+            <a:r>
+              <a:rPr lang="en-US" altLang="ja-JP" sz="2800" b="1" baseline="-25000" dirty="0"/>
+              <a:t>F</a:t>
+            </a:r>
+            <a:r>
+              <a:rPr lang="en-US" altLang="ja-JP" sz="2800" b="1" dirty="0"/>
+              <a:t>(c(</a:t>
+            </a:r>
+            <a:r>
+              <a:rPr lang="en-US" altLang="ja-JP" b="1" dirty="0">
+                <a:latin typeface="Source Sans Pro" panose="020B0503030403020204" pitchFamily="34" charset="0"/>
+              </a:rPr>
+              <a:t>u</a:t>
+            </a:r>
+            <a:r>
+              <a:rPr lang="en-US" altLang="ja-JP" sz="2800" b="1" i="0" baseline="-25000" dirty="0">
+                <a:effectLst/>
+                <a:latin typeface="Source Sans Pro" panose="020B0503030403020204" pitchFamily="34" charset="0"/>
+              </a:rPr>
+              <a:t>1</a:t>
+            </a:r>
+            <a:r>
+              <a:rPr lang="el-GR" altLang="ja-JP" sz="2800" b="1" i="0" dirty="0">
+                <a:effectLst/>
+                <a:latin typeface="Source Sans Pro" panose="020B0503030403020204" pitchFamily="34" charset="0"/>
+              </a:rPr>
+              <a:t> </a:t>
+            </a:r>
+            <a:r>
+              <a:rPr lang="en-US" altLang="ja-JP" sz="2800" b="1" dirty="0"/>
+              <a:t>):c(</a:t>
+            </a:r>
+            <a:r>
+              <a:rPr lang="el-GR" altLang="ja-JP" sz="2800" b="1" i="0" dirty="0">
+                <a:effectLst/>
+                <a:latin typeface="Source Sans Pro" panose="020B0503030403020204" pitchFamily="34" charset="0"/>
+              </a:rPr>
+              <a:t> </a:t>
+            </a:r>
+            <a:r>
+              <a:rPr lang="en-US" altLang="ja-JP" sz="2800" b="1" i="0" dirty="0">
+                <a:effectLst/>
+                <a:latin typeface="Source Sans Pro" panose="020B0503030403020204" pitchFamily="34" charset="0"/>
+              </a:rPr>
+              <a:t>u</a:t>
+            </a:r>
+            <a:r>
+              <a:rPr lang="en-US" altLang="ja-JP" sz="2800" b="1" i="0" baseline="-25000" dirty="0">
+                <a:effectLst/>
+                <a:latin typeface="Source Sans Pro" panose="020B0503030403020204" pitchFamily="34" charset="0"/>
+              </a:rPr>
+              <a:t>2</a:t>
+            </a:r>
+            <a:r>
+              <a:rPr lang="en-US" altLang="ja-JP" dirty="0"/>
+              <a:t>)) </a:t>
+            </a:r>
+            <a:r>
+              <a:rPr lang="en-US" altLang="ja-JP" sz="2400" dirty="0"/>
+              <a:t>is not Bregman when {c(u) | u </a:t>
+            </a:r>
+            <a:r>
+              <a:rPr lang="ja-JP" altLang="en-US" sz="2400" b="0" i="0" dirty="0">
+                <a:effectLst/>
+                <a:latin typeface="Source Sans Pro" panose="020B0503030403020204" pitchFamily="34" charset="0"/>
+              </a:rPr>
+              <a:t>∈</a:t>
+            </a:r>
+            <a:r>
+              <a:rPr lang="en-US" altLang="ja-JP" sz="2400" dirty="0"/>
+              <a:t> U} not convex. </a:t>
+            </a:r>
+            <a:r>
+              <a:rPr lang="en-US" altLang="ja-JP" sz="2400" dirty="0" err="1"/>
+              <a:t>cBDs</a:t>
+            </a:r>
+            <a:r>
+              <a:rPr lang="en-US" altLang="ja-JP" sz="2400" dirty="0"/>
+              <a:t> usually not BDs unless constraints c(.) are affine</a:t>
+            </a:r>
+            <a:endParaRPr kumimoji="1" lang="en-US" altLang="ja-JP" sz="2400" dirty="0"/>
+          </a:p>
+          <a:p>
+            <a:pPr marL="0" indent="0">
+              <a:buNone/>
+            </a:pPr>
+            <a:endParaRPr kumimoji="1" lang="ja-JP" altLang="en-US" dirty="0"/>
+          </a:p>
+        </p:txBody>
+      </p:sp>
+      <p:pic>
+        <p:nvPicPr>
+          <p:cNvPr id="8" name="Picture 7">
+            <a:extLst>
+              <a:ext uri="{FF2B5EF4-FFF2-40B4-BE49-F238E27FC236}">
+                <a16:creationId xmlns:a16="http://schemas.microsoft.com/office/drawing/2014/main" id="{C7DADA56-BA9D-E1DD-836D-14A38EEE7E1A}"/>
+              </a:ext>
+            </a:extLst>
+          </p:cNvPr>
+          <p:cNvPicPr>
+            <a:picLocks noChangeAspect="1"/>
+          </p:cNvPicPr>
+          <p:nvPr/>
+        </p:nvPicPr>
+        <p:blipFill>
+          <a:blip r:embed="rId3"/>
+          <a:stretch>
+            <a:fillRect/>
+          </a:stretch>
+        </p:blipFill>
+        <p:spPr>
+          <a:xfrm>
+            <a:off x="750282" y="2933949"/>
+            <a:ext cx="11279765" cy="3093811"/>
+          </a:xfrm>
+          <a:prstGeom prst="rect">
+            <a:avLst/>
+          </a:prstGeom>
+        </p:spPr>
+      </p:pic>
+      <p:sp>
+        <p:nvSpPr>
+          <p:cNvPr id="13" name="TextBox 12">
+            <a:extLst>
+              <a:ext uri="{FF2B5EF4-FFF2-40B4-BE49-F238E27FC236}">
+                <a16:creationId xmlns:a16="http://schemas.microsoft.com/office/drawing/2014/main" id="{68BC75CC-ECE9-90C8-A455-A6DA92DA4B85}"/>
+              </a:ext>
+            </a:extLst>
+          </p:cNvPr>
+          <p:cNvSpPr txBox="1"/>
+          <p:nvPr/>
+        </p:nvSpPr>
+        <p:spPr>
+          <a:xfrm>
+            <a:off x="412955" y="2359696"/>
+            <a:ext cx="7051930" cy="523220"/>
+          </a:xfrm>
+          <a:prstGeom prst="rect">
+            <a:avLst/>
+          </a:prstGeom>
+          <a:noFill/>
+        </p:spPr>
+        <p:txBody>
+          <a:bodyPr wrap="none" rtlCol="0">
+            <a:spAutoFit/>
+          </a:bodyPr>
+          <a:lstStyle/>
+          <a:p>
+            <a:r>
+              <a:rPr kumimoji="1" lang="en-US" altLang="ja-JP" sz="2800" dirty="0"/>
+              <a:t>By analogy to curved exponential families</a:t>
+            </a:r>
+            <a:endParaRPr kumimoji="1" lang="ja-JP" altLang="en-US" sz="2800" dirty="0"/>
+          </a:p>
+        </p:txBody>
+      </p:sp>
+      <p:sp>
+        <p:nvSpPr>
+          <p:cNvPr id="4" name="TextBox 3">
+            <a:extLst>
+              <a:ext uri="{FF2B5EF4-FFF2-40B4-BE49-F238E27FC236}">
+                <a16:creationId xmlns:a16="http://schemas.microsoft.com/office/drawing/2014/main" id="{EFAA62CA-6C15-2754-2203-037B56F1BACA}"/>
+              </a:ext>
+            </a:extLst>
+          </p:cNvPr>
+          <p:cNvSpPr txBox="1"/>
+          <p:nvPr/>
+        </p:nvSpPr>
+        <p:spPr>
+          <a:xfrm>
+            <a:off x="750282" y="6078793"/>
+            <a:ext cx="11259814" cy="369332"/>
+          </a:xfrm>
+          <a:prstGeom prst="rect">
+            <a:avLst/>
+          </a:prstGeom>
+          <a:noFill/>
+        </p:spPr>
+        <p:txBody>
+          <a:bodyPr wrap="none" rtlCol="0">
+            <a:spAutoFit/>
+          </a:bodyPr>
+          <a:lstStyle/>
+          <a:p>
+            <a:r>
+              <a:rPr kumimoji="1" lang="en-US" altLang="ja-JP" dirty="0"/>
+              <a:t>For example, U is real vector space, V is symmetric matrix vector space, CEF is sub-family of Gaussians </a:t>
+            </a:r>
+            <a:endParaRPr kumimoji="1" lang="ja-JP" altLang="en-US" dirty="0"/>
+          </a:p>
+        </p:txBody>
+      </p:sp>
+    </p:spTree>
+    <p:extLst>
+      <p:ext uri="{BB962C8B-B14F-4D97-AF65-F5344CB8AC3E}">
+        <p14:creationId xmlns:p14="http://schemas.microsoft.com/office/powerpoint/2010/main" val="1734479787"/>
+      </p:ext>
+    </p:extLst>
+  </p:cSld>
+  <p:clrMapOvr>
+    <a:masterClrMapping/>
+  </p:clrMapOvr>
+</p:sld>
+</file>
+
+<file path=ppt/slides/slide11.xml><?xml version="1.0" encoding="utf-8"?>
+<p:sld xmlns:a="http://schemas.openxmlformats.org/drawingml/2006/main" xmlns:r="http://schemas.openxmlformats.org/officeDocument/2006/relationships" xmlns:p="http://schemas.openxmlformats.org/presentationml/2006/main">
+  <p:cSld>
+    <p:spTree>
+      <p:nvGrpSpPr>
+        <p:cNvPr id="1" name=""/>
+        <p:cNvGrpSpPr/>
+        <p:nvPr/>
+      </p:nvGrpSpPr>
+      <p:grpSpPr>
+        <a:xfrm>
+          <a:off x="0" y="0"/>
+          <a:ext cx="0" cy="0"/>
+          <a:chOff x="0" y="0"/>
+          <a:chExt cx="0" cy="0"/>
+        </a:xfrm>
+      </p:grpSpPr>
       <p:pic>
         <p:nvPicPr>
           <p:cNvPr id="15" name="Picture 14">
@@ -6524,7 +7115,7 @@
 </p:sld>
 </file>
 
-<file path=ppt/slides/slide11.xml><?xml version="1.0" encoding="utf-8"?>
+<file path=ppt/slides/slide12.xml><?xml version="1.0" encoding="utf-8"?>
 <p:sld xmlns:a="http://schemas.openxmlformats.org/drawingml/2006/main" xmlns:r="http://schemas.openxmlformats.org/officeDocument/2006/relationships" xmlns:p="http://schemas.openxmlformats.org/presentationml/2006/main">
   <p:cSld>
     <p:spTree>
@@ -7060,133 +7651,6 @@
     <p:extLst>
       <p:ext uri="{BB962C8B-B14F-4D97-AF65-F5344CB8AC3E}">
         <p14:creationId xmlns:p14="http://schemas.microsoft.com/office/powerpoint/2010/main" val="705029104"/>
-      </p:ext>
-    </p:extLst>
-  </p:cSld>
-  <p:clrMapOvr>
-    <a:masterClrMapping/>
-  </p:clrMapOvr>
-</p:sld>
-</file>
-
-<file path=ppt/slides/slide12.xml><?xml version="1.0" encoding="utf-8"?>
-<p:sld xmlns:a="http://schemas.openxmlformats.org/drawingml/2006/main" xmlns:r="http://schemas.openxmlformats.org/officeDocument/2006/relationships" xmlns:p="http://schemas.openxmlformats.org/presentationml/2006/main">
-  <p:cSld>
-    <p:spTree>
-      <p:nvGrpSpPr>
-        <p:cNvPr id="1" name=""/>
-        <p:cNvGrpSpPr/>
-        <p:nvPr/>
-      </p:nvGrpSpPr>
-      <p:grpSpPr>
-        <a:xfrm>
-          <a:off x="0" y="0"/>
-          <a:ext cx="0" cy="0"/>
-          <a:chOff x="0" y="0"/>
-          <a:chExt cx="0" cy="0"/>
-        </a:xfrm>
-      </p:grpSpPr>
-      <p:sp>
-        <p:nvSpPr>
-          <p:cNvPr id="2" name="Title 1">
-            <a:extLst>
-              <a:ext uri="{FF2B5EF4-FFF2-40B4-BE49-F238E27FC236}">
-                <a16:creationId xmlns:a16="http://schemas.microsoft.com/office/drawing/2014/main" id="{60A766F9-B844-6095-524E-97DF7C3D3A68}"/>
-              </a:ext>
-            </a:extLst>
-          </p:cNvPr>
-          <p:cNvSpPr>
-            <a:spLocks noGrp="1"/>
-          </p:cNvSpPr>
-          <p:nvPr>
-            <p:ph type="title"/>
-          </p:nvPr>
-        </p:nvSpPr>
-        <p:spPr/>
-        <p:txBody>
-          <a:bodyPr/>
-          <a:lstStyle/>
-          <a:p>
-            <a:endParaRPr kumimoji="1" lang="ja-JP" altLang="en-US"/>
-          </a:p>
-        </p:txBody>
-      </p:sp>
-      <p:sp>
-        <p:nvSpPr>
-          <p:cNvPr id="3" name="Content Placeholder 2">
-            <a:extLst>
-              <a:ext uri="{FF2B5EF4-FFF2-40B4-BE49-F238E27FC236}">
-                <a16:creationId xmlns:a16="http://schemas.microsoft.com/office/drawing/2014/main" id="{4863C991-7146-FA11-EC93-F703DC0FEA19}"/>
-              </a:ext>
-            </a:extLst>
-          </p:cNvPr>
-          <p:cNvSpPr>
-            <a:spLocks noGrp="1"/>
-          </p:cNvSpPr>
-          <p:nvPr>
-            <p:ph idx="1"/>
-          </p:nvPr>
-        </p:nvSpPr>
-        <p:spPr/>
-        <p:txBody>
-          <a:bodyPr/>
-          <a:lstStyle/>
-          <a:p>
-            <a:endParaRPr kumimoji="1" lang="ja-JP" altLang="en-US"/>
-          </a:p>
-        </p:txBody>
-      </p:sp>
-      <p:pic>
-        <p:nvPicPr>
-          <p:cNvPr id="1026" name="Picture 2" descr="Image">
-            <a:extLst>
-              <a:ext uri="{FF2B5EF4-FFF2-40B4-BE49-F238E27FC236}">
-                <a16:creationId xmlns:a16="http://schemas.microsoft.com/office/drawing/2014/main" id="{A2364C05-7DB1-2542-53D8-96D75C8AFC18}"/>
-              </a:ext>
-            </a:extLst>
-          </p:cNvPr>
-          <p:cNvPicPr>
-            <a:picLocks noChangeAspect="1" noChangeArrowheads="1"/>
-          </p:cNvPicPr>
-          <p:nvPr/>
-        </p:nvPicPr>
-        <p:blipFill>
-          <a:blip r:embed="rId2">
-            <a:extLst>
-              <a:ext uri="{28A0092B-C50C-407E-A947-70E740481C1C}">
-                <a14:useLocalDpi xmlns:a14="http://schemas.microsoft.com/office/drawing/2010/main" val="0"/>
-              </a:ext>
-            </a:extLst>
-          </a:blip>
-          <a:srcRect/>
-          <a:stretch>
-            <a:fillRect/>
-          </a:stretch>
-        </p:blipFill>
-        <p:spPr bwMode="auto">
-          <a:xfrm>
-            <a:off x="0" y="0"/>
-            <a:ext cx="12192000" cy="6858000"/>
-          </a:xfrm>
-          <a:prstGeom prst="rect">
-            <a:avLst/>
-          </a:prstGeom>
-          <a:noFill/>
-          <a:extLst>
-            <a:ext uri="{909E8E84-426E-40DD-AFC4-6F175D3DCCD1}">
-              <a14:hiddenFill xmlns:a14="http://schemas.microsoft.com/office/drawing/2010/main">
-                <a:solidFill>
-                  <a:srgbClr val="FFFFFF"/>
-                </a:solidFill>
-              </a14:hiddenFill>
-            </a:ext>
-          </a:extLst>
-        </p:spPr>
-      </p:pic>
-    </p:spTree>
-    <p:extLst>
-      <p:ext uri="{BB962C8B-B14F-4D97-AF65-F5344CB8AC3E}">
-        <p14:creationId xmlns:p14="http://schemas.microsoft.com/office/powerpoint/2010/main" val="1659508999"/>
       </p:ext>
     </p:extLst>
   </p:cSld>
@@ -7218,6 +7682,133 @@
           <p:cNvPr id="2" name="Title 1">
             <a:extLst>
               <a:ext uri="{FF2B5EF4-FFF2-40B4-BE49-F238E27FC236}">
+                <a16:creationId xmlns:a16="http://schemas.microsoft.com/office/drawing/2014/main" id="{60A766F9-B844-6095-524E-97DF7C3D3A68}"/>
+              </a:ext>
+            </a:extLst>
+          </p:cNvPr>
+          <p:cNvSpPr>
+            <a:spLocks noGrp="1"/>
+          </p:cNvSpPr>
+          <p:nvPr>
+            <p:ph type="title"/>
+          </p:nvPr>
+        </p:nvSpPr>
+        <p:spPr/>
+        <p:txBody>
+          <a:bodyPr/>
+          <a:lstStyle/>
+          <a:p>
+            <a:endParaRPr kumimoji="1" lang="ja-JP" altLang="en-US"/>
+          </a:p>
+        </p:txBody>
+      </p:sp>
+      <p:sp>
+        <p:nvSpPr>
+          <p:cNvPr id="3" name="Content Placeholder 2">
+            <a:extLst>
+              <a:ext uri="{FF2B5EF4-FFF2-40B4-BE49-F238E27FC236}">
+                <a16:creationId xmlns:a16="http://schemas.microsoft.com/office/drawing/2014/main" id="{4863C991-7146-FA11-EC93-F703DC0FEA19}"/>
+              </a:ext>
+            </a:extLst>
+          </p:cNvPr>
+          <p:cNvSpPr>
+            <a:spLocks noGrp="1"/>
+          </p:cNvSpPr>
+          <p:nvPr>
+            <p:ph idx="1"/>
+          </p:nvPr>
+        </p:nvSpPr>
+        <p:spPr/>
+        <p:txBody>
+          <a:bodyPr/>
+          <a:lstStyle/>
+          <a:p>
+            <a:endParaRPr kumimoji="1" lang="ja-JP" altLang="en-US"/>
+          </a:p>
+        </p:txBody>
+      </p:sp>
+      <p:pic>
+        <p:nvPicPr>
+          <p:cNvPr id="1026" name="Picture 2" descr="Image">
+            <a:extLst>
+              <a:ext uri="{FF2B5EF4-FFF2-40B4-BE49-F238E27FC236}">
+                <a16:creationId xmlns:a16="http://schemas.microsoft.com/office/drawing/2014/main" id="{A2364C05-7DB1-2542-53D8-96D75C8AFC18}"/>
+              </a:ext>
+            </a:extLst>
+          </p:cNvPr>
+          <p:cNvPicPr>
+            <a:picLocks noChangeAspect="1" noChangeArrowheads="1"/>
+          </p:cNvPicPr>
+          <p:nvPr/>
+        </p:nvPicPr>
+        <p:blipFill>
+          <a:blip r:embed="rId2">
+            <a:extLst>
+              <a:ext uri="{28A0092B-C50C-407E-A947-70E740481C1C}">
+                <a14:useLocalDpi xmlns:a14="http://schemas.microsoft.com/office/drawing/2010/main" val="0"/>
+              </a:ext>
+            </a:extLst>
+          </a:blip>
+          <a:srcRect/>
+          <a:stretch>
+            <a:fillRect/>
+          </a:stretch>
+        </p:blipFill>
+        <p:spPr bwMode="auto">
+          <a:xfrm>
+            <a:off x="0" y="0"/>
+            <a:ext cx="12192000" cy="6858000"/>
+          </a:xfrm>
+          <a:prstGeom prst="rect">
+            <a:avLst/>
+          </a:prstGeom>
+          <a:noFill/>
+          <a:extLst>
+            <a:ext uri="{909E8E84-426E-40DD-AFC4-6F175D3DCCD1}">
+              <a14:hiddenFill xmlns:a14="http://schemas.microsoft.com/office/drawing/2010/main">
+                <a:solidFill>
+                  <a:srgbClr val="FFFFFF"/>
+                </a:solidFill>
+              </a14:hiddenFill>
+            </a:ext>
+          </a:extLst>
+        </p:spPr>
+      </p:pic>
+    </p:spTree>
+    <p:extLst>
+      <p:ext uri="{BB962C8B-B14F-4D97-AF65-F5344CB8AC3E}">
+        <p14:creationId xmlns:p14="http://schemas.microsoft.com/office/powerpoint/2010/main" val="1659508999"/>
+      </p:ext>
+    </p:extLst>
+  </p:cSld>
+  <p:clrMapOvr>
+    <a:masterClrMapping/>
+  </p:clrMapOvr>
+</p:sld>
+</file>
+
+<file path=ppt/slides/slide14.xml><?xml version="1.0" encoding="utf-8"?>
+<p:sld xmlns:a="http://schemas.openxmlformats.org/drawingml/2006/main" xmlns:r="http://schemas.openxmlformats.org/officeDocument/2006/relationships" xmlns:p="http://schemas.openxmlformats.org/presentationml/2006/main">
+  <p:cSld>
+    <p:spTree>
+      <p:nvGrpSpPr>
+        <p:cNvPr id="1" name=""/>
+        <p:cNvGrpSpPr/>
+        <p:nvPr/>
+      </p:nvGrpSpPr>
+      <p:grpSpPr>
+        <a:xfrm>
+          <a:off x="0" y="0"/>
+          <a:ext cx="0" cy="0"/>
+          <a:chOff x="0" y="0"/>
+          <a:chExt cx="0" cy="0"/>
+        </a:xfrm>
+      </p:grpSpPr>
+      <p:sp>
+        <p:nvSpPr>
+          <p:cNvPr id="2" name="Title 1">
+            <a:extLst>
+              <a:ext uri="{FF2B5EF4-FFF2-40B4-BE49-F238E27FC236}">
                 <a16:creationId xmlns:a16="http://schemas.microsoft.com/office/drawing/2014/main" id="{92B89756-CDBE-D604-54C2-1BA3F148EA10}"/>
               </a:ext>
             </a:extLst>
@@ -7996,7 +8587,7 @@
 </p:sld>
 </file>
 
-<file path=ppt/slides/slide14.xml><?xml version="1.0" encoding="utf-8"?>
+<file path=ppt/slides/slide15.xml><?xml version="1.0" encoding="utf-8"?>
 <p:sld xmlns:a="http://schemas.openxmlformats.org/drawingml/2006/main" xmlns:r="http://schemas.openxmlformats.org/officeDocument/2006/relationships" xmlns:p="http://schemas.openxmlformats.org/presentationml/2006/main">
   <p:cSld>
     <p:spTree>
@@ -8607,7 +9198,7 @@
 </p:sld>
 </file>
 
-<file path=ppt/slides/slide15.xml><?xml version="1.0" encoding="utf-8"?>
+<file path=ppt/slides/slide16.xml><?xml version="1.0" encoding="utf-8"?>
 <p:sld xmlns:a="http://schemas.openxmlformats.org/drawingml/2006/main" xmlns:r="http://schemas.openxmlformats.org/officeDocument/2006/relationships" xmlns:p="http://schemas.openxmlformats.org/presentationml/2006/main">
   <p:cSld>
     <p:spTree>
@@ -8902,7 +9493,7 @@
 </p:sld>
 </file>
 
-<file path=ppt/slides/slide16.xml><?xml version="1.0" encoding="utf-8"?>
+<file path=ppt/slides/slide17.xml><?xml version="1.0" encoding="utf-8"?>
 <p:sld xmlns:a="http://schemas.openxmlformats.org/drawingml/2006/main" xmlns:r="http://schemas.openxmlformats.org/officeDocument/2006/relationships" xmlns:p="http://schemas.openxmlformats.org/presentationml/2006/main">
   <p:cSld>
     <p:spTree>
@@ -9331,154 +9922,6 @@
 </p:sld>
 </file>
 
-<file path=ppt/slides/slide17.xml><?xml version="1.0" encoding="utf-8"?>
-<p:sld xmlns:a="http://schemas.openxmlformats.org/drawingml/2006/main" xmlns:r="http://schemas.openxmlformats.org/officeDocument/2006/relationships" xmlns:p="http://schemas.openxmlformats.org/presentationml/2006/main">
-  <p:cSld>
-    <p:spTree>
-      <p:nvGrpSpPr>
-        <p:cNvPr id="1" name=""/>
-        <p:cNvGrpSpPr/>
-        <p:nvPr/>
-      </p:nvGrpSpPr>
-      <p:grpSpPr>
-        <a:xfrm>
-          <a:off x="0" y="0"/>
-          <a:ext cx="0" cy="0"/>
-          <a:chOff x="0" y="0"/>
-          <a:chExt cx="0" cy="0"/>
-        </a:xfrm>
-      </p:grpSpPr>
-      <p:sp>
-        <p:nvSpPr>
-          <p:cNvPr id="2" name="Title 1">
-            <a:extLst>
-              <a:ext uri="{FF2B5EF4-FFF2-40B4-BE49-F238E27FC236}">
-                <a16:creationId xmlns:a16="http://schemas.microsoft.com/office/drawing/2014/main" id="{71D7C039-F565-C0AE-E06A-6E1E77D1240B}"/>
-              </a:ext>
-            </a:extLst>
-          </p:cNvPr>
-          <p:cNvSpPr>
-            <a:spLocks noGrp="1"/>
-          </p:cNvSpPr>
-          <p:nvPr>
-            <p:ph type="title"/>
-          </p:nvPr>
-        </p:nvSpPr>
-        <p:spPr>
-          <a:xfrm>
-            <a:off x="237308" y="260622"/>
-            <a:ext cx="10515600" cy="1325563"/>
-          </a:xfrm>
-        </p:spPr>
-        <p:txBody>
-          <a:bodyPr/>
-          <a:lstStyle/>
-          <a:p>
-            <a:r>
-              <a:rPr kumimoji="1" lang="en-US" altLang="ja-JP" dirty="0">
-                <a:solidFill>
-                  <a:schemeClr val="accent4"/>
-                </a:solidFill>
-              </a:rPr>
-              <a:t>Summary: Some examples of curved BDs</a:t>
-            </a:r>
-            <a:endParaRPr kumimoji="1" lang="ja-JP" altLang="en-US" dirty="0">
-              <a:solidFill>
-                <a:schemeClr val="accent4"/>
-              </a:solidFill>
-            </a:endParaRPr>
-          </a:p>
-        </p:txBody>
-      </p:sp>
-      <p:sp>
-        <p:nvSpPr>
-          <p:cNvPr id="3" name="Content Placeholder 2">
-            <a:extLst>
-              <a:ext uri="{FF2B5EF4-FFF2-40B4-BE49-F238E27FC236}">
-                <a16:creationId xmlns:a16="http://schemas.microsoft.com/office/drawing/2014/main" id="{6C45D632-92FC-F69A-C8CA-CFB4472D2AD0}"/>
-              </a:ext>
-            </a:extLst>
-          </p:cNvPr>
-          <p:cNvSpPr>
-            <a:spLocks noGrp="1"/>
-          </p:cNvSpPr>
-          <p:nvPr>
-            <p:ph idx="1"/>
-          </p:nvPr>
-        </p:nvSpPr>
-        <p:spPr>
-          <a:xfrm>
-            <a:off x="352697" y="1825625"/>
-            <a:ext cx="11839303" cy="4351338"/>
-          </a:xfrm>
-        </p:spPr>
-        <p:txBody>
-          <a:bodyPr>
-            <a:normAutofit fontScale="92500"/>
-          </a:bodyPr>
-          <a:lstStyle/>
-          <a:p>
-            <a:r>
-              <a:rPr kumimoji="1" lang="en-US" altLang="ja-JP" dirty="0"/>
-              <a:t>Cosine dissimilarity!  </a:t>
-            </a:r>
-          </a:p>
-          <a:p>
-            <a:r>
-              <a:rPr lang="en-US" altLang="ja-JP" dirty="0"/>
-              <a:t>Symmetrized Bregman divergences </a:t>
-            </a:r>
-          </a:p>
-          <a:p>
-            <a:r>
-              <a:rPr lang="en-US" altLang="ja-JP" dirty="0"/>
-              <a:t>Augmented mixed-Bregman Jeffreys-Bregman divergence</a:t>
-            </a:r>
-          </a:p>
-          <a:p>
-            <a:endParaRPr kumimoji="1" lang="en-US" altLang="ja-JP" dirty="0"/>
-          </a:p>
-          <a:p>
-            <a:r>
-              <a:rPr lang="en-US" altLang="ja-JP" dirty="0" err="1"/>
-              <a:t>Kullback</a:t>
-            </a:r>
-            <a:r>
-              <a:rPr lang="en-US" altLang="ja-JP" dirty="0"/>
-              <a:t>-Leibler divergence between complex circular normal distributions is a curved BD</a:t>
-            </a:r>
-          </a:p>
-          <a:p>
-            <a:r>
-              <a:rPr kumimoji="1" lang="en-US" altLang="ja-JP" dirty="0"/>
-              <a:t>KLD between curved exponential families</a:t>
-            </a:r>
-          </a:p>
-          <a:p>
-            <a:endParaRPr lang="en-US" altLang="ja-JP" dirty="0"/>
-          </a:p>
-          <a:p>
-            <a:r>
-              <a:rPr kumimoji="1" lang="en-US" altLang="ja-JP" dirty="0"/>
-              <a:t>Curved Bregman centroid is Bregman centroid projected onto submanifold</a:t>
-            </a:r>
-            <a:endParaRPr kumimoji="1" lang="ja-JP" altLang="en-US" dirty="0"/>
-          </a:p>
-        </p:txBody>
-      </p:sp>
-    </p:spTree>
-    <p:extLst>
-      <p:ext uri="{BB962C8B-B14F-4D97-AF65-F5344CB8AC3E}">
-        <p14:creationId xmlns:p14="http://schemas.microsoft.com/office/powerpoint/2010/main" val="708062543"/>
-      </p:ext>
-    </p:extLst>
-  </p:cSld>
-  <p:clrMapOvr>
-    <a:masterClrMapping/>
-  </p:clrMapOvr>
-</p:sld>
-</file>
-
 <file path=ppt/slides/slide18.xml><?xml version="1.0" encoding="utf-8"?>
 <p:sld xmlns:a="http://schemas.openxmlformats.org/drawingml/2006/main" xmlns:r="http://schemas.openxmlformats.org/officeDocument/2006/relationships" xmlns:p="http://schemas.openxmlformats.org/presentationml/2006/main">
   <p:cSld>
@@ -9501,7 +9944,7 @@
           <p:cNvPr id="2" name="Title 1">
             <a:extLst>
               <a:ext uri="{FF2B5EF4-FFF2-40B4-BE49-F238E27FC236}">
-                <a16:creationId xmlns:a16="http://schemas.microsoft.com/office/drawing/2014/main" id="{A3B986F9-D552-E1B9-2744-00E82560EA61}"/>
+                <a16:creationId xmlns:a16="http://schemas.microsoft.com/office/drawing/2014/main" id="{71D7C039-F565-C0AE-E06A-6E1E77D1240B}"/>
               </a:ext>
             </a:extLst>
           </p:cNvPr>
@@ -9512,12 +9955,29 @@
             <p:ph type="title"/>
           </p:nvPr>
         </p:nvSpPr>
-        <p:spPr/>
+        <p:spPr>
+          <a:xfrm>
+            <a:off x="237308" y="260622"/>
+            <a:ext cx="10515600" cy="1325563"/>
+          </a:xfrm>
+        </p:spPr>
         <p:txBody>
           <a:bodyPr/>
           <a:lstStyle/>
           <a:p>
-            <a:endParaRPr kumimoji="1" lang="ja-JP" altLang="en-US"/>
+            <a:r>
+              <a:rPr kumimoji="1" lang="en-US" altLang="ja-JP" dirty="0">
+                <a:solidFill>
+                  <a:schemeClr val="accent4"/>
+                </a:solidFill>
+              </a:rPr>
+              <a:t>Summary: Some examples of curved BDs</a:t>
+            </a:r>
+            <a:endParaRPr kumimoji="1" lang="ja-JP" altLang="en-US" dirty="0">
+              <a:solidFill>
+                <a:schemeClr val="accent4"/>
+              </a:solidFill>
+            </a:endParaRPr>
           </a:p>
         </p:txBody>
       </p:sp>
@@ -9526,7 +9986,7 @@
           <p:cNvPr id="3" name="Content Placeholder 2">
             <a:extLst>
               <a:ext uri="{FF2B5EF4-FFF2-40B4-BE49-F238E27FC236}">
-                <a16:creationId xmlns:a16="http://schemas.microsoft.com/office/drawing/2014/main" id="{A345B7B4-75C5-2017-7FC2-A206FD34DC81}"/>
+                <a16:creationId xmlns:a16="http://schemas.microsoft.com/office/drawing/2014/main" id="{6C45D632-92FC-F69A-C8CA-CFB4472D2AD0}"/>
               </a:ext>
             </a:extLst>
           </p:cNvPr>
@@ -9537,19 +9997,70 @@
             <p:ph idx="1"/>
           </p:nvPr>
         </p:nvSpPr>
-        <p:spPr/>
+        <p:spPr>
+          <a:xfrm>
+            <a:off x="352697" y="1825625"/>
+            <a:ext cx="11839303" cy="4351338"/>
+          </a:xfrm>
+        </p:spPr>
         <p:txBody>
-          <a:bodyPr/>
+          <a:bodyPr>
+            <a:normAutofit fontScale="92500"/>
+          </a:bodyPr>
           <a:lstStyle/>
           <a:p>
-            <a:endParaRPr kumimoji="1" lang="ja-JP" altLang="en-US"/>
+            <a:r>
+              <a:rPr kumimoji="1" lang="en-US" altLang="ja-JP" dirty="0"/>
+              <a:t>Cosine dissimilarity!  </a:t>
+            </a:r>
+          </a:p>
+          <a:p>
+            <a:r>
+              <a:rPr lang="en-US" altLang="ja-JP" dirty="0"/>
+              <a:t>Symmetrized Bregman divergences </a:t>
+            </a:r>
+          </a:p>
+          <a:p>
+            <a:r>
+              <a:rPr lang="en-US" altLang="ja-JP" dirty="0"/>
+              <a:t>Augmented mixed-Bregman Jeffreys-Bregman divergence</a:t>
+            </a:r>
+          </a:p>
+          <a:p>
+            <a:endParaRPr kumimoji="1" lang="en-US" altLang="ja-JP" dirty="0"/>
+          </a:p>
+          <a:p>
+            <a:r>
+              <a:rPr lang="en-US" altLang="ja-JP" dirty="0" err="1"/>
+              <a:t>Kullback</a:t>
+            </a:r>
+            <a:r>
+              <a:rPr lang="en-US" altLang="ja-JP" dirty="0"/>
+              <a:t>-Leibler divergence between complex circular normal distributions is a curved BD</a:t>
+            </a:r>
+          </a:p>
+          <a:p>
+            <a:r>
+              <a:rPr kumimoji="1" lang="en-US" altLang="ja-JP" dirty="0"/>
+              <a:t>KLD between curved exponential families</a:t>
+            </a:r>
+          </a:p>
+          <a:p>
+            <a:endParaRPr lang="en-US" altLang="ja-JP" dirty="0"/>
+          </a:p>
+          <a:p>
+            <a:r>
+              <a:rPr kumimoji="1" lang="en-US" altLang="ja-JP" dirty="0"/>
+              <a:t>Curved Bregman centroid is Bregman centroid projected onto submanifold</a:t>
+            </a:r>
+            <a:endParaRPr kumimoji="1" lang="ja-JP" altLang="en-US" dirty="0"/>
           </a:p>
         </p:txBody>
       </p:sp>
     </p:spTree>
     <p:extLst>
       <p:ext uri="{BB962C8B-B14F-4D97-AF65-F5344CB8AC3E}">
-        <p14:creationId xmlns:p14="http://schemas.microsoft.com/office/powerpoint/2010/main" val="1575014000"/>
+        <p14:creationId xmlns:p14="http://schemas.microsoft.com/office/powerpoint/2010/main" val="708062543"/>
       </p:ext>
     </p:extLst>
   </p:cSld>
@@ -9581,7 +10092,7 @@
           <p:cNvPr id="2" name="Title 1">
             <a:extLst>
               <a:ext uri="{FF2B5EF4-FFF2-40B4-BE49-F238E27FC236}">
-                <a16:creationId xmlns:a16="http://schemas.microsoft.com/office/drawing/2014/main" id="{241FC527-3A47-E9D8-6748-FE36BD507B83}"/>
+                <a16:creationId xmlns:a16="http://schemas.microsoft.com/office/drawing/2014/main" id="{A3B986F9-D552-E1B9-2744-00E82560EA61}"/>
               </a:ext>
             </a:extLst>
           </p:cNvPr>
@@ -9606,7 +10117,7 @@
           <p:cNvPr id="3" name="Content Placeholder 2">
             <a:extLst>
               <a:ext uri="{FF2B5EF4-FFF2-40B4-BE49-F238E27FC236}">
-                <a16:creationId xmlns:a16="http://schemas.microsoft.com/office/drawing/2014/main" id="{1EB275D3-030B-6F6B-DCD3-F8A218AC12AB}"/>
+                <a16:creationId xmlns:a16="http://schemas.microsoft.com/office/drawing/2014/main" id="{A345B7B4-75C5-2017-7FC2-A206FD34DC81}"/>
               </a:ext>
             </a:extLst>
           </p:cNvPr>
@@ -9622,18 +10133,14 @@
           <a:bodyPr/>
           <a:lstStyle/>
           <a:p>
-            <a:r>
-              <a:rPr kumimoji="1" lang="en-US" altLang="ja-JP" dirty="0"/>
-              <a:t>Uniqueness of symmetrized BD centroid: As a Jeffreys centroid which is a SKL f-divergence</a:t>
-            </a:r>
-            <a:endParaRPr kumimoji="1" lang="ja-JP" altLang="en-US" dirty="0"/>
+            <a:endParaRPr kumimoji="1" lang="ja-JP" altLang="en-US"/>
           </a:p>
         </p:txBody>
       </p:sp>
     </p:spTree>
     <p:extLst>
       <p:ext uri="{BB962C8B-B14F-4D97-AF65-F5344CB8AC3E}">
-        <p14:creationId xmlns:p14="http://schemas.microsoft.com/office/powerpoint/2010/main" val="1608525486"/>
+        <p14:creationId xmlns:p14="http://schemas.microsoft.com/office/powerpoint/2010/main" val="1575014000"/>
       </p:ext>
     </p:extLst>
   </p:cSld>
@@ -11558,6 +12065,90 @@
 </file>
 
 <file path=ppt/slides/slide20.xml><?xml version="1.0" encoding="utf-8"?>
+<p:sld xmlns:a="http://schemas.openxmlformats.org/drawingml/2006/main" xmlns:r="http://schemas.openxmlformats.org/officeDocument/2006/relationships" xmlns:p="http://schemas.openxmlformats.org/presentationml/2006/main">
+  <p:cSld>
+    <p:spTree>
+      <p:nvGrpSpPr>
+        <p:cNvPr id="1" name=""/>
+        <p:cNvGrpSpPr/>
+        <p:nvPr/>
+      </p:nvGrpSpPr>
+      <p:grpSpPr>
+        <a:xfrm>
+          <a:off x="0" y="0"/>
+          <a:ext cx="0" cy="0"/>
+          <a:chOff x="0" y="0"/>
+          <a:chExt cx="0" cy="0"/>
+        </a:xfrm>
+      </p:grpSpPr>
+      <p:sp>
+        <p:nvSpPr>
+          <p:cNvPr id="2" name="Title 1">
+            <a:extLst>
+              <a:ext uri="{FF2B5EF4-FFF2-40B4-BE49-F238E27FC236}">
+                <a16:creationId xmlns:a16="http://schemas.microsoft.com/office/drawing/2014/main" id="{241FC527-3A47-E9D8-6748-FE36BD507B83}"/>
+              </a:ext>
+            </a:extLst>
+          </p:cNvPr>
+          <p:cNvSpPr>
+            <a:spLocks noGrp="1"/>
+          </p:cNvSpPr>
+          <p:nvPr>
+            <p:ph type="title"/>
+          </p:nvPr>
+        </p:nvSpPr>
+        <p:spPr/>
+        <p:txBody>
+          <a:bodyPr/>
+          <a:lstStyle/>
+          <a:p>
+            <a:endParaRPr kumimoji="1" lang="ja-JP" altLang="en-US"/>
+          </a:p>
+        </p:txBody>
+      </p:sp>
+      <p:sp>
+        <p:nvSpPr>
+          <p:cNvPr id="3" name="Content Placeholder 2">
+            <a:extLst>
+              <a:ext uri="{FF2B5EF4-FFF2-40B4-BE49-F238E27FC236}">
+                <a16:creationId xmlns:a16="http://schemas.microsoft.com/office/drawing/2014/main" id="{1EB275D3-030B-6F6B-DCD3-F8A218AC12AB}"/>
+              </a:ext>
+            </a:extLst>
+          </p:cNvPr>
+          <p:cNvSpPr>
+            <a:spLocks noGrp="1"/>
+          </p:cNvSpPr>
+          <p:nvPr>
+            <p:ph idx="1"/>
+          </p:nvPr>
+        </p:nvSpPr>
+        <p:spPr/>
+        <p:txBody>
+          <a:bodyPr/>
+          <a:lstStyle/>
+          <a:p>
+            <a:r>
+              <a:rPr kumimoji="1" lang="en-US" altLang="ja-JP" dirty="0"/>
+              <a:t>Uniqueness of symmetrized BD centroid: As a Jeffreys centroid which is a SKL f-divergence</a:t>
+            </a:r>
+            <a:endParaRPr kumimoji="1" lang="ja-JP" altLang="en-US" dirty="0"/>
+          </a:p>
+        </p:txBody>
+      </p:sp>
+    </p:spTree>
+    <p:extLst>
+      <p:ext uri="{BB962C8B-B14F-4D97-AF65-F5344CB8AC3E}">
+        <p14:creationId xmlns:p14="http://schemas.microsoft.com/office/powerpoint/2010/main" val="1608525486"/>
+      </p:ext>
+    </p:extLst>
+  </p:cSld>
+  <p:clrMapOvr>
+    <a:masterClrMapping/>
+  </p:clrMapOvr>
+</p:sld>
+</file>
+
+<file path=ppt/slides/slide21.xml><?xml version="1.0" encoding="utf-8"?>
 <p:sld xmlns:a="http://schemas.openxmlformats.org/drawingml/2006/main" xmlns:r="http://schemas.openxmlformats.org/officeDocument/2006/relationships" xmlns:p="http://schemas.openxmlformats.org/presentationml/2006/main">
   <p:cSld>
     <p:spTree>
@@ -12749,7 +13340,7 @@
 </p:sld>
 </file>
 
-<file path=ppt/slides/slide21.xml><?xml version="1.0" encoding="utf-8"?>
+<file path=ppt/slides/slide22.xml><?xml version="1.0" encoding="utf-8"?>
 <p:sld xmlns:a="http://schemas.openxmlformats.org/drawingml/2006/main" xmlns:r="http://schemas.openxmlformats.org/officeDocument/2006/relationships" xmlns:p="http://schemas.openxmlformats.org/presentationml/2006/main">
   <p:cSld>
     <p:spTree>
@@ -13463,7 +14054,7 @@
 </p:sld>
 </file>
 
-<file path=ppt/slides/slide22.xml><?xml version="1.0" encoding="utf-8"?>
+<file path=ppt/slides/slide23.xml><?xml version="1.0" encoding="utf-8"?>
 <p:sld xmlns:a="http://schemas.openxmlformats.org/drawingml/2006/main" xmlns:r="http://schemas.openxmlformats.org/officeDocument/2006/relationships" xmlns:p="http://schemas.openxmlformats.org/presentationml/2006/main">
   <p:cSld>
     <p:spTree>
@@ -14531,7 +15122,7 @@
           <a:p>
             <a:fld id="{31CF226C-95D4-40B8-9E1A-366D2434025F}" type="slidenum">
               <a:rPr kumimoji="1" lang="ja-JP" altLang="en-US" smtClean="0"/>
-              <a:t>22</a:t>
+              <a:t>23</a:t>
             </a:fld>
             <a:endParaRPr kumimoji="1" lang="ja-JP" altLang="en-US"/>
           </a:p>
@@ -14694,7 +15285,7 @@
 </p:sld>
 </file>
 
-<file path=ppt/slides/slide23.xml><?xml version="1.0" encoding="utf-8"?>
+<file path=ppt/slides/slide24.xml><?xml version="1.0" encoding="utf-8"?>
 <p:sld xmlns:a="http://schemas.openxmlformats.org/drawingml/2006/main" xmlns:r="http://schemas.openxmlformats.org/officeDocument/2006/relationships" xmlns:p="http://schemas.openxmlformats.org/presentationml/2006/main">
   <p:cSld>
     <p:spTree>
@@ -15372,7 +15963,7 @@
 </p:sld>
 </file>
 
-<file path=ppt/slides/slide24.xml><?xml version="1.0" encoding="utf-8"?>
+<file path=ppt/slides/slide25.xml><?xml version="1.0" encoding="utf-8"?>
 <p:sld xmlns:a="http://schemas.openxmlformats.org/drawingml/2006/main" xmlns:r="http://schemas.openxmlformats.org/officeDocument/2006/relationships" xmlns:p="http://schemas.openxmlformats.org/presentationml/2006/main">
   <p:cSld>
     <p:spTree>
@@ -19117,7 +19708,13 @@
   <p:cSld>
     <p:spTree>
       <p:nvGrpSpPr>
-        <p:cNvPr id="1" name=""/>
+        <p:cNvPr id="1" name="">
+          <a:extLst>
+            <a:ext uri="{FF2B5EF4-FFF2-40B4-BE49-F238E27FC236}">
+              <a16:creationId xmlns:a16="http://schemas.microsoft.com/office/drawing/2014/main" id="{9E3E940F-F4EF-33A4-598F-311A0D22785D}"/>
+            </a:ext>
+          </a:extLst>
+        </p:cNvPr>
         <p:cNvGrpSpPr/>
         <p:nvPr/>
       </p:nvGrpSpPr>
@@ -19131,68 +19728,10 @@
       </p:grpSpPr>
       <p:sp>
         <p:nvSpPr>
-          <p:cNvPr id="2" name="Title 1">
-            <a:extLst>
-              <a:ext uri="{FF2B5EF4-FFF2-40B4-BE49-F238E27FC236}">
-                <a16:creationId xmlns:a16="http://schemas.microsoft.com/office/drawing/2014/main" id="{72ACF8DF-06D7-0751-02E2-4AE545A796D4}"/>
-              </a:ext>
-            </a:extLst>
-          </p:cNvPr>
-          <p:cNvSpPr>
-            <a:spLocks noGrp="1"/>
-          </p:cNvSpPr>
-          <p:nvPr>
-            <p:ph type="title"/>
-          </p:nvPr>
-        </p:nvSpPr>
-        <p:spPr>
-          <a:xfrm>
-            <a:off x="122146" y="-28193"/>
-            <a:ext cx="10515600" cy="1325563"/>
-          </a:xfrm>
-        </p:spPr>
-        <p:txBody>
-          <a:bodyPr/>
-          <a:lstStyle/>
-          <a:p>
-            <a:r>
-              <a:rPr kumimoji="1" lang="en-US" altLang="ja-JP" b="1" dirty="0">
-                <a:solidFill>
-                  <a:schemeClr val="accent4"/>
-                </a:solidFill>
-              </a:rPr>
-              <a:t>Curved Bregman divergences (</a:t>
-            </a:r>
-            <a:r>
-              <a:rPr kumimoji="1" lang="en-US" altLang="ja-JP" b="1" dirty="0" err="1">
-                <a:solidFill>
-                  <a:schemeClr val="accent4"/>
-                </a:solidFill>
-              </a:rPr>
-              <a:t>cBDs</a:t>
-            </a:r>
-            <a:r>
-              <a:rPr kumimoji="1" lang="en-US" altLang="ja-JP" b="1" dirty="0">
-                <a:solidFill>
-                  <a:schemeClr val="accent4"/>
-                </a:solidFill>
-              </a:rPr>
-              <a:t>)</a:t>
-            </a:r>
-            <a:endParaRPr kumimoji="1" lang="ja-JP" altLang="en-US" b="1" dirty="0">
-              <a:solidFill>
-                <a:schemeClr val="accent4"/>
-              </a:solidFill>
-            </a:endParaRPr>
-          </a:p>
-        </p:txBody>
-      </p:sp>
-      <p:sp>
-        <p:nvSpPr>
           <p:cNvPr id="3" name="Content Placeholder 2">
             <a:extLst>
               <a:ext uri="{FF2B5EF4-FFF2-40B4-BE49-F238E27FC236}">
-                <a16:creationId xmlns:a16="http://schemas.microsoft.com/office/drawing/2014/main" id="{9C97A531-0B0F-8C0C-AFCE-774C3FDD4DE3}"/>
+                <a16:creationId xmlns:a16="http://schemas.microsoft.com/office/drawing/2014/main" id="{D2803FA4-A105-48AD-A88A-0F65193B5811}"/>
               </a:ext>
             </a:extLst>
           </p:cNvPr>
@@ -19205,282 +19744,37 @@
         </p:nvSpPr>
         <p:spPr>
           <a:xfrm>
-            <a:off x="177089" y="976323"/>
-            <a:ext cx="11798015" cy="2353871"/>
+            <a:off x="7067007" y="1825625"/>
+            <a:ext cx="5124994" cy="4351338"/>
           </a:xfrm>
         </p:spPr>
         <p:txBody>
           <a:bodyPr/>
           <a:lstStyle/>
           <a:p>
-            <a:pPr marL="0" indent="0">
-              <a:buNone/>
-            </a:pPr>
-            <a:r>
-              <a:rPr lang="en-US" altLang="ja-JP" sz="2800" dirty="0"/>
-              <a:t>Consider a domain U which maps to a subset of </a:t>
-            </a:r>
-            <a:r>
-              <a:rPr lang="el-GR" altLang="ja-JP" i="0" dirty="0">
-                <a:effectLst/>
-                <a:latin typeface="Source Sans Pro" panose="020B0503030403020204" pitchFamily="34" charset="0"/>
-              </a:rPr>
-              <a:t>Θ</a:t>
-            </a:r>
-            <a:r>
-              <a:rPr lang="en-US" altLang="ja-JP" sz="2800" dirty="0"/>
-              <a:t>  by  </a:t>
-            </a:r>
-            <a:r>
-              <a:rPr lang="el-GR" altLang="ja-JP" sz="2800" i="0" dirty="0">
-                <a:effectLst/>
-                <a:latin typeface="Source Sans Pro" panose="020B0503030403020204" pitchFamily="34" charset="0"/>
-              </a:rPr>
-              <a:t>θ </a:t>
-            </a:r>
-            <a:r>
-              <a:rPr lang="en-US" altLang="ja-JP" sz="2800" i="0" dirty="0">
-                <a:effectLst/>
-                <a:latin typeface="Source Sans Pro" panose="020B0503030403020204" pitchFamily="34" charset="0"/>
-              </a:rPr>
-              <a:t>=</a:t>
-            </a:r>
-            <a:r>
-              <a:rPr lang="en-US" altLang="ja-JP" sz="2800" dirty="0"/>
-              <a:t>c(</a:t>
-            </a:r>
-            <a:r>
-              <a:rPr lang="en-US" altLang="ja-JP" dirty="0">
-                <a:latin typeface="Source Sans Pro" panose="020B0503030403020204" pitchFamily="34" charset="0"/>
-              </a:rPr>
-              <a:t>u</a:t>
-            </a:r>
-            <a:r>
-              <a:rPr lang="en-US" altLang="ja-JP" sz="2800" dirty="0"/>
-              <a:t>) </a:t>
-            </a:r>
-            <a:r>
-              <a:rPr lang="en-US" altLang="ja-JP" dirty="0"/>
-              <a:t>with </a:t>
-            </a:r>
-            <a:r>
-              <a:rPr lang="en-US" altLang="ja-JP" b="1" dirty="0"/>
-              <a:t>dim(U) &lt; dim(</a:t>
-            </a:r>
-            <a:r>
-              <a:rPr lang="el-GR" altLang="ja-JP" b="1" i="0" dirty="0">
-                <a:effectLst/>
-                <a:latin typeface="Source Sans Pro" panose="020B0503030403020204" pitchFamily="34" charset="0"/>
-              </a:rPr>
-              <a:t>Θ</a:t>
-            </a:r>
-            <a:r>
-              <a:rPr lang="en-US" altLang="ja-JP" b="1" dirty="0"/>
-              <a:t>) </a:t>
-            </a:r>
-            <a:r>
-              <a:rPr lang="en-US" altLang="ja-JP" sz="2800" dirty="0"/>
-              <a:t>: </a:t>
-            </a:r>
-            <a:r>
-              <a:rPr lang="en-US" altLang="ja-JP" sz="2800" b="1" dirty="0" err="1">
-                <a:solidFill>
-                  <a:srgbClr val="FF0000"/>
-                </a:solidFill>
-              </a:rPr>
-              <a:t>B</a:t>
-            </a:r>
-            <a:r>
-              <a:rPr lang="en-US" altLang="ja-JP" sz="2800" b="1" baseline="-25000" dirty="0" err="1">
-                <a:solidFill>
-                  <a:srgbClr val="FF0000"/>
-                </a:solidFill>
-              </a:rPr>
-              <a:t>F,c</a:t>
-            </a:r>
-            <a:r>
-              <a:rPr lang="en-US" altLang="ja-JP" sz="2800" b="1" dirty="0">
-                <a:solidFill>
-                  <a:srgbClr val="FF0000"/>
-                </a:solidFill>
-              </a:rPr>
-              <a:t>(</a:t>
-            </a:r>
-            <a:r>
-              <a:rPr lang="en-US" altLang="ja-JP" b="1" dirty="0">
-                <a:solidFill>
-                  <a:srgbClr val="FF0000"/>
-                </a:solidFill>
-                <a:latin typeface="Source Sans Pro" panose="020B0503030403020204" pitchFamily="34" charset="0"/>
-              </a:rPr>
-              <a:t>u</a:t>
-            </a:r>
-            <a:r>
-              <a:rPr lang="en-US" altLang="ja-JP" sz="2800" b="1" i="0" baseline="-25000" dirty="0">
-                <a:solidFill>
-                  <a:srgbClr val="FF0000"/>
-                </a:solidFill>
-                <a:effectLst/>
-                <a:latin typeface="Source Sans Pro" panose="020B0503030403020204" pitchFamily="34" charset="0"/>
-              </a:rPr>
-              <a:t>1</a:t>
-            </a:r>
-            <a:r>
-              <a:rPr lang="el-GR" altLang="ja-JP" sz="2800" b="1" i="0" dirty="0">
-                <a:solidFill>
-                  <a:srgbClr val="FF0000"/>
-                </a:solidFill>
-                <a:effectLst/>
-                <a:latin typeface="Source Sans Pro" panose="020B0503030403020204" pitchFamily="34" charset="0"/>
-              </a:rPr>
-              <a:t> </a:t>
-            </a:r>
-            <a:r>
-              <a:rPr lang="en-US" altLang="ja-JP" sz="2800" b="1" dirty="0">
-                <a:solidFill>
-                  <a:srgbClr val="FF0000"/>
-                </a:solidFill>
-              </a:rPr>
-              <a:t>:</a:t>
-            </a:r>
-            <a:r>
-              <a:rPr lang="el-GR" altLang="ja-JP" sz="2800" b="1" i="0" dirty="0">
-                <a:solidFill>
-                  <a:srgbClr val="FF0000"/>
-                </a:solidFill>
-                <a:effectLst/>
-                <a:latin typeface="Source Sans Pro" panose="020B0503030403020204" pitchFamily="34" charset="0"/>
-              </a:rPr>
-              <a:t> </a:t>
-            </a:r>
-            <a:r>
-              <a:rPr lang="en-US" altLang="ja-JP" sz="2800" b="1" i="0" dirty="0">
-                <a:solidFill>
-                  <a:srgbClr val="FF0000"/>
-                </a:solidFill>
-                <a:effectLst/>
-                <a:latin typeface="Source Sans Pro" panose="020B0503030403020204" pitchFamily="34" charset="0"/>
-              </a:rPr>
-              <a:t>u</a:t>
-            </a:r>
-            <a:r>
-              <a:rPr lang="en-US" altLang="ja-JP" sz="2800" b="1" i="0" baseline="-25000" dirty="0">
-                <a:solidFill>
-                  <a:srgbClr val="FF0000"/>
-                </a:solidFill>
-                <a:effectLst/>
-                <a:latin typeface="Source Sans Pro" panose="020B0503030403020204" pitchFamily="34" charset="0"/>
-              </a:rPr>
-              <a:t>2</a:t>
-            </a:r>
-            <a:r>
-              <a:rPr lang="en-US" altLang="ja-JP" sz="2800" b="1" dirty="0">
-                <a:solidFill>
-                  <a:srgbClr val="FF0000"/>
-                </a:solidFill>
-              </a:rPr>
-              <a:t>) </a:t>
-            </a:r>
-            <a:r>
-              <a:rPr lang="en-US" altLang="ja-JP" sz="2800" b="1" dirty="0"/>
-              <a:t>:= B</a:t>
-            </a:r>
-            <a:r>
-              <a:rPr lang="en-US" altLang="ja-JP" sz="2800" b="1" baseline="-25000" dirty="0"/>
-              <a:t>F</a:t>
-            </a:r>
-            <a:r>
-              <a:rPr lang="en-US" altLang="ja-JP" sz="2800" b="1" dirty="0"/>
-              <a:t>(c(</a:t>
-            </a:r>
-            <a:r>
-              <a:rPr lang="en-US" altLang="ja-JP" b="1" dirty="0">
-                <a:latin typeface="Source Sans Pro" panose="020B0503030403020204" pitchFamily="34" charset="0"/>
-              </a:rPr>
-              <a:t>u</a:t>
-            </a:r>
-            <a:r>
-              <a:rPr lang="en-US" altLang="ja-JP" sz="2800" b="1" i="0" baseline="-25000" dirty="0">
-                <a:effectLst/>
-                <a:latin typeface="Source Sans Pro" panose="020B0503030403020204" pitchFamily="34" charset="0"/>
-              </a:rPr>
-              <a:t>1</a:t>
-            </a:r>
-            <a:r>
-              <a:rPr lang="el-GR" altLang="ja-JP" sz="2800" b="1" i="0" dirty="0">
-                <a:effectLst/>
-                <a:latin typeface="Source Sans Pro" panose="020B0503030403020204" pitchFamily="34" charset="0"/>
-              </a:rPr>
-              <a:t> </a:t>
-            </a:r>
-            <a:r>
-              <a:rPr lang="en-US" altLang="ja-JP" sz="2800" b="1" dirty="0"/>
-              <a:t>):c(</a:t>
-            </a:r>
-            <a:r>
-              <a:rPr lang="el-GR" altLang="ja-JP" sz="2800" b="1" i="0" dirty="0">
-                <a:effectLst/>
-                <a:latin typeface="Source Sans Pro" panose="020B0503030403020204" pitchFamily="34" charset="0"/>
-              </a:rPr>
-              <a:t> </a:t>
-            </a:r>
-            <a:r>
-              <a:rPr lang="en-US" altLang="ja-JP" sz="2800" b="1" i="0" dirty="0">
-                <a:effectLst/>
-                <a:latin typeface="Source Sans Pro" panose="020B0503030403020204" pitchFamily="34" charset="0"/>
-              </a:rPr>
-              <a:t>u</a:t>
-            </a:r>
-            <a:r>
-              <a:rPr lang="en-US" altLang="ja-JP" sz="2800" b="1" i="0" baseline="-25000" dirty="0">
-                <a:effectLst/>
-                <a:latin typeface="Source Sans Pro" panose="020B0503030403020204" pitchFamily="34" charset="0"/>
-              </a:rPr>
-              <a:t>2</a:t>
-            </a:r>
-            <a:r>
-              <a:rPr lang="en-US" altLang="ja-JP" dirty="0"/>
-              <a:t>)) </a:t>
-            </a:r>
-            <a:r>
-              <a:rPr lang="en-US" altLang="ja-JP" sz="2400" dirty="0"/>
-              <a:t>is not Bregman when {c(u) | u </a:t>
-            </a:r>
-            <a:r>
-              <a:rPr lang="ja-JP" altLang="en-US" sz="2400" b="0" i="0" dirty="0">
-                <a:effectLst/>
-                <a:latin typeface="Source Sans Pro" panose="020B0503030403020204" pitchFamily="34" charset="0"/>
-              </a:rPr>
-              <a:t>∈</a:t>
-            </a:r>
-            <a:r>
-              <a:rPr lang="en-US" altLang="ja-JP" sz="2400" dirty="0"/>
-              <a:t> U} not convex. </a:t>
-            </a:r>
-            <a:r>
-              <a:rPr lang="en-US" altLang="ja-JP" sz="2400" dirty="0" err="1"/>
-              <a:t>cBDs</a:t>
-            </a:r>
-            <a:r>
-              <a:rPr lang="en-US" altLang="ja-JP" sz="2400" dirty="0"/>
-              <a:t> usually not BDs unless constraints c(.) are affine</a:t>
-            </a:r>
-            <a:endParaRPr kumimoji="1" lang="en-US" altLang="ja-JP" sz="2400" dirty="0"/>
-          </a:p>
-          <a:p>
-            <a:pPr marL="0" indent="0">
-              <a:buNone/>
-            </a:pPr>
+            <a:r>
+              <a:rPr kumimoji="1" lang="en-US" altLang="ja-JP" dirty="0"/>
+              <a:t>Extended KLD+ is Bregman divergence with separable generator</a:t>
+            </a:r>
+          </a:p>
+          <a:p>
+            <a:endParaRPr lang="en-US" altLang="ja-JP" dirty="0"/>
+          </a:p>
+          <a:p>
+            <a:r>
+              <a:rPr kumimoji="1" lang="en-US" altLang="ja-JP" dirty="0"/>
+              <a:t>KLD between normalized densities is sub-dimensional KLD+ restricted to standard simplex (affine U)</a:t>
+            </a:r>
             <a:endParaRPr kumimoji="1" lang="ja-JP" altLang="en-US" dirty="0"/>
           </a:p>
         </p:txBody>
       </p:sp>
       <p:pic>
         <p:nvPicPr>
-          <p:cNvPr id="8" name="Picture 7">
-            <a:extLst>
-              <a:ext uri="{FF2B5EF4-FFF2-40B4-BE49-F238E27FC236}">
-                <a16:creationId xmlns:a16="http://schemas.microsoft.com/office/drawing/2014/main" id="{C7DADA56-BA9D-E1DD-836D-14A38EEE7E1A}"/>
+          <p:cNvPr id="5" name="Picture 4">
+            <a:extLst>
+              <a:ext uri="{FF2B5EF4-FFF2-40B4-BE49-F238E27FC236}">
+                <a16:creationId xmlns:a16="http://schemas.microsoft.com/office/drawing/2014/main" id="{2823015E-5484-05B0-5DB2-99084FEB6513}"/>
               </a:ext>
             </a:extLst>
           </p:cNvPr>
@@ -19497,8 +19791,8 @@
         </p:blipFill>
         <p:spPr>
           <a:xfrm>
-            <a:off x="750282" y="2933949"/>
-            <a:ext cx="11279765" cy="3093811"/>
+            <a:off x="209005" y="1374020"/>
+            <a:ext cx="7116849" cy="5483979"/>
           </a:xfrm>
           <a:prstGeom prst="rect">
             <a:avLst/>
@@ -19507,80 +19801,58 @@
       </p:pic>
       <p:sp>
         <p:nvSpPr>
-          <p:cNvPr id="13" name="TextBox 12">
-            <a:extLst>
-              <a:ext uri="{FF2B5EF4-FFF2-40B4-BE49-F238E27FC236}">
-                <a16:creationId xmlns:a16="http://schemas.microsoft.com/office/drawing/2014/main" id="{68BC75CC-ECE9-90C8-A455-A6DA92DA4B85}"/>
-              </a:ext>
-            </a:extLst>
-          </p:cNvPr>
-          <p:cNvSpPr txBox="1"/>
-          <p:nvPr/>
+          <p:cNvPr id="6" name="Title 1">
+            <a:extLst>
+              <a:ext uri="{FF2B5EF4-FFF2-40B4-BE49-F238E27FC236}">
+                <a16:creationId xmlns:a16="http://schemas.microsoft.com/office/drawing/2014/main" id="{7E11DF42-8A4B-4C91-A7C1-91D1526D587F}"/>
+              </a:ext>
+            </a:extLst>
+          </p:cNvPr>
+          <p:cNvSpPr>
+            <a:spLocks noGrp="1"/>
+          </p:cNvSpPr>
+          <p:nvPr>
+            <p:ph type="title"/>
+          </p:nvPr>
         </p:nvSpPr>
         <p:spPr>
           <a:xfrm>
-            <a:off x="412955" y="2359696"/>
-            <a:ext cx="7051930" cy="523220"/>
+            <a:off x="838200" y="365125"/>
+            <a:ext cx="10515600" cy="1325563"/>
           </a:xfrm>
-          <a:prstGeom prst="rect">
-            <a:avLst/>
-          </a:prstGeom>
-          <a:noFill/>
         </p:spPr>
         <p:txBody>
-          <a:bodyPr wrap="none" rtlCol="0">
-            <a:spAutoFit/>
-          </a:bodyPr>
+          <a:bodyPr/>
           <a:lstStyle/>
           <a:p>
             <a:r>
-              <a:rPr kumimoji="1" lang="en-US" altLang="ja-JP" sz="2800" dirty="0"/>
-              <a:t>By analogy to curved exponential families</a:t>
-            </a:r>
-            <a:endParaRPr kumimoji="1" lang="ja-JP" altLang="en-US" sz="2800" dirty="0"/>
-          </a:p>
-        </p:txBody>
-      </p:sp>
-      <p:sp>
-        <p:nvSpPr>
-          <p:cNvPr id="4" name="TextBox 3">
-            <a:extLst>
-              <a:ext uri="{FF2B5EF4-FFF2-40B4-BE49-F238E27FC236}">
-                <a16:creationId xmlns:a16="http://schemas.microsoft.com/office/drawing/2014/main" id="{EFAA62CA-6C15-2754-2203-037B56F1BACA}"/>
-              </a:ext>
-            </a:extLst>
-          </p:cNvPr>
-          <p:cNvSpPr txBox="1"/>
-          <p:nvPr/>
-        </p:nvSpPr>
-        <p:spPr>
-          <a:xfrm>
-            <a:off x="750282" y="6078793"/>
-            <a:ext cx="11259814" cy="369332"/>
-          </a:xfrm>
-          <a:prstGeom prst="rect">
-            <a:avLst/>
-          </a:prstGeom>
-          <a:noFill/>
-        </p:spPr>
-        <p:txBody>
-          <a:bodyPr wrap="none" rtlCol="0">
-            <a:spAutoFit/>
-          </a:bodyPr>
-          <a:lstStyle/>
-          <a:p>
-            <a:r>
-              <a:rPr kumimoji="1" lang="en-US" altLang="ja-JP" dirty="0"/>
-              <a:t>For example, U is real vector space, V is symmetric matrix vector space, CEF is sub-family of Gaussians </a:t>
-            </a:r>
-            <a:endParaRPr kumimoji="1" lang="ja-JP" altLang="en-US" dirty="0"/>
+              <a:rPr kumimoji="1" lang="en-US" altLang="ja-JP" dirty="0" err="1">
+                <a:solidFill>
+                  <a:schemeClr val="accent4"/>
+                </a:solidFill>
+              </a:rPr>
+              <a:t>Subdimensional</a:t>
+            </a:r>
+            <a:r>
+              <a:rPr kumimoji="1" lang="en-US" altLang="ja-JP" dirty="0">
+                <a:solidFill>
+                  <a:schemeClr val="accent4"/>
+                </a:solidFill>
+              </a:rPr>
+              <a:t> Bregman divergences…</a:t>
+            </a:r>
+            <a:endParaRPr kumimoji="1" lang="ja-JP" altLang="en-US" dirty="0">
+              <a:solidFill>
+                <a:schemeClr val="accent4"/>
+              </a:solidFill>
+            </a:endParaRPr>
           </a:p>
         </p:txBody>
       </p:sp>
     </p:spTree>
     <p:extLst>
       <p:ext uri="{BB962C8B-B14F-4D97-AF65-F5344CB8AC3E}">
-        <p14:creationId xmlns:p14="http://schemas.microsoft.com/office/powerpoint/2010/main" val="1734479787"/>
+        <p14:creationId xmlns:p14="http://schemas.microsoft.com/office/powerpoint/2010/main" val="685933074"/>
       </p:ext>
     </p:extLst>
   </p:cSld>
